--- a/docs/presentacion.pptx
+++ b/docs/presentacion.pptx
@@ -4,6 +4,9 @@
   <p:sldMasterIdLst>
     <p:sldMasterId id="2147483648" r:id="rId1"/>
   </p:sldMasterIdLst>
+  <p:notesMasterIdLst>
+    <p:notesMasterId r:id="rId11"/>
+  </p:notesMasterIdLst>
   <p:sldIdLst>
     <p:sldId id="256" r:id="rId2"/>
     <p:sldId id="257" r:id="rId3"/>
@@ -15,9 +18,6 @@
     <p:sldId id="263" r:id="rId9"/>
     <p:sldId id="264" r:id="rId10"/>
   </p:sldIdLst>
-  <p:notesMasterIdLst>
-    <p:notesMasterId r:id="rId11"/>
-  </p:notesMasterIdLst>
   <p:sldSz cx="12192000" cy="6858000"/>
   <p:notesSz cx="6858000" cy="12192000"/>
   <p:defaultTextStyle>
@@ -112,13 +112,20 @@
       </a:defRPr>
     </a:lvl9pPr>
   </p:defaultTextStyle>
+  <p:extLst>
+    <p:ext uri="{EFAFB233-063F-42B5-8137-9DF3F51BA10A}">
+      <p15:sldGuideLst xmlns:p15="http://schemas.microsoft.com/office/powerpoint/2012/main"/>
+    </p:ext>
+  </p:extLst>
 </p:presentation>
 </file>
 
 <file path=ppt/charts/chart1.xml><?xml version="1.0" encoding="utf-8"?>
-<c:chartSpace xmlns:c="http://schemas.openxmlformats.org/drawingml/2006/chart" xmlns:a="http://schemas.openxmlformats.org/drawingml/2006/main" xmlns:r="http://schemas.openxmlformats.org/officeDocument/2006/relationships">
+<c:chartSpace xmlns:c="http://schemas.openxmlformats.org/drawingml/2006/chart" xmlns:a="http://schemas.openxmlformats.org/drawingml/2006/main" xmlns:r="http://schemas.openxmlformats.org/officeDocument/2006/relationships" xmlns:c16r2="http://schemas.microsoft.com/office/drawing/2015/06/chart">
   <c:date1904 val="0"/>
+  <c:lang val="es-ES"/>
   <c:roundedCorners val="1"/>
+  <c:style val="2"/>
   <c:chart>
     <c:title>
       <c:tx>
@@ -135,7 +142,7 @@
               </a:defRPr>
             </a:pPr>
             <a:r>
-              <a:rPr sz="1400" b="0" i="0" u="none" strike="noStrike">
+              <a:rPr lang="es-CL" sz="1400" b="0" i="0" u="none" strike="noStrike">
                 <a:solidFill>
                   <a:srgbClr val="24302A"/>
                 </a:solidFill>
@@ -146,7 +153,6 @@
           </a:p>
         </c:rich>
       </c:tx>
-      <c:layout/>
       <c:overlay val="0"/>
     </c:title>
     <c:autoTitleDeleted val="0"/>
@@ -179,18 +185,26 @@
           <c:invertIfNegative val="0"/>
           <c:dLbls>
             <c:numFmt formatCode="#,##0" sourceLinked="0"/>
+            <c:spPr>
+              <a:noFill/>
+              <a:ln>
+                <a:noFill/>
+              </a:ln>
+              <a:effectLst/>
+            </c:spPr>
             <c:txPr>
               <a:bodyPr/>
               <a:lstStyle/>
               <a:p>
                 <a:pPr>
-                  <a:defRPr b="0" i="0" strike="noStrike" sz="1100" u="none">
+                  <a:defRPr sz="1100" b="0" i="0" u="none" strike="noStrike">
                     <a:solidFill>
                       <a:srgbClr val="24302A"/>
                     </a:solidFill>
                     <a:latin typeface="Arial"/>
                   </a:defRPr>
                 </a:pPr>
+                <a:endParaRPr lang="es-CL"/>
               </a:p>
             </c:txPr>
             <c:showLegendKey val="0"/>
@@ -200,28 +214,31 @@
             <c:showPercent val="0"/>
             <c:showBubbleSize val="0"/>
             <c:showLeaderLines val="0"/>
+            <c:extLst>
+              <c:ext xmlns:c15="http://schemas.microsoft.com/office/drawing/2012/chart" uri="{CE6537A1-D6FC-4f65-9D91-7224C49458BB}">
+                <c15:showLeaderLines val="0"/>
+              </c:ext>
+            </c:extLst>
           </c:dLbls>
           <c:cat>
-            <c:multiLvlStrRef>
+            <c:strRef>
               <c:f>Sheet1!$A$2:$A$5</c:f>
-              <c:multiLvlStrCache>
+              <c:strCache>
                 <c:ptCount val="4"/>
-                <c:lvl>
-                  <c:pt idx="0">
-                    <c:v>Baseline</c:v>
-                  </c:pt>
-                  <c:pt idx="1">
-                    <c:v>Reg. lineal</c:v>
-                  </c:pt>
-                  <c:pt idx="2">
-                    <c:v>Random Forest</c:v>
-                  </c:pt>
-                  <c:pt idx="3">
-                    <c:v>XGBoost</c:v>
-                  </c:pt>
-                </c:lvl>
-              </c:multiLvlStrCache>
-            </c:multiLvlStrRef>
+                <c:pt idx="0">
+                  <c:v>Baseline</c:v>
+                </c:pt>
+                <c:pt idx="1">
+                  <c:v>Reg. lineal</c:v>
+                </c:pt>
+                <c:pt idx="2">
+                  <c:v>Random Forest</c:v>
+                </c:pt>
+                <c:pt idx="3">
+                  <c:v>XGBoost</c:v>
+                </c:pt>
+              </c:strCache>
+            </c:strRef>
           </c:cat>
           <c:val>
             <c:numRef>
@@ -230,50 +247,37 @@
                 <c:formatCode>General</c:formatCode>
                 <c:ptCount val="4"/>
                 <c:pt idx="0">
-                  <c:v>0.638</c:v>
+                  <c:v>0.63800000000000001</c:v>
                 </c:pt>
                 <c:pt idx="1">
-                  <c:v>0.831</c:v>
+                  <c:v>0.83099999999999996</c:v>
                 </c:pt>
                 <c:pt idx="2">
-                  <c:v>0.947</c:v>
+                  <c:v>0.94699999999999995</c:v>
                 </c:pt>
                 <c:pt idx="3">
-                  <c:v>0.961</c:v>
+                  <c:v>0.96099999999999997</c:v>
                 </c:pt>
               </c:numCache>
             </c:numRef>
           </c:val>
+          <c:extLst>
+            <c:ext xmlns:c16="http://schemas.microsoft.com/office/drawing/2014/chart" uri="{C3380CC4-5D6E-409C-BE32-E72D297353CC}">
+              <c16:uniqueId val="{00000000-9485-4067-BDFC-8352290962A2}"/>
+            </c:ext>
+          </c:extLst>
         </c:ser>
         <c:dLbls>
-          <c:numFmt formatCode="#,##0" sourceLinked="0"/>
-          <c:txPr>
-            <a:bodyPr/>
-            <a:lstStyle/>
-            <a:p>
-              <a:pPr>
-                <a:defRPr b="0" i="0" strike="noStrike" sz="1100" u="none">
-                  <a:solidFill>
-                    <a:srgbClr val="24302A"/>
-                  </a:solidFill>
-                  <a:latin typeface="Arial"/>
-                </a:defRPr>
-              </a:pPr>
-            </a:p>
-          </c:txPr>
           <c:showLegendKey val="0"/>
           <c:showVal val="1"/>
           <c:showCatName val="0"/>
           <c:showSerName val="0"/>
           <c:showPercent val="0"/>
           <c:showBubbleSize val="0"/>
-          <c:showLeaderLines val="0"/>
         </c:dLbls>
         <c:gapWidth val="150"/>
-        <c:overlap val="0"/>
         <c:axId val="2094734554"/>
         <c:axId val="2094734552"/>
-        <c:axId val="2094734556"/>
       </c:barChart>
       <c:catAx>
         <c:axId val="2094734554"/>
@@ -314,6 +318,7 @@
         <c:crosses val="autoZero"/>
         <c:auto val="1"/>
         <c:lblAlgn val="ctr"/>
+        <c:lblOffset val="100"/>
         <c:noMultiLvlLbl val="1"/>
       </c:catAx>
       <c:valAx>
@@ -378,6 +383,7 @@
     </c:plotArea>
     <c:plotVisOnly val="1"/>
     <c:dispBlanksAs val="span"/>
+    <c:showDLblsOverMax val="1"/>
   </c:chart>
   <c:spPr>
     <a:noFill/>
@@ -393,9 +399,11 @@
 </file>
 
 <file path=ppt/charts/chart2.xml><?xml version="1.0" encoding="utf-8"?>
-<c:chartSpace xmlns:c="http://schemas.openxmlformats.org/drawingml/2006/chart" xmlns:a="http://schemas.openxmlformats.org/drawingml/2006/main" xmlns:r="http://schemas.openxmlformats.org/officeDocument/2006/relationships">
+<c:chartSpace xmlns:c="http://schemas.openxmlformats.org/drawingml/2006/chart" xmlns:a="http://schemas.openxmlformats.org/drawingml/2006/main" xmlns:r="http://schemas.openxmlformats.org/officeDocument/2006/relationships" xmlns:c16r2="http://schemas.microsoft.com/office/drawing/2015/06/chart">
   <c:date1904 val="0"/>
+  <c:lang val="es-ES"/>
   <c:roundedCorners val="1"/>
+  <c:style val="2"/>
   <c:chart>
     <c:autoTitleDeleted val="1"/>
     <c:plotArea>
@@ -427,18 +435,26 @@
           <c:invertIfNegative val="0"/>
           <c:dLbls>
             <c:numFmt formatCode="#,##0" sourceLinked="0"/>
+            <c:spPr>
+              <a:noFill/>
+              <a:ln>
+                <a:noFill/>
+              </a:ln>
+              <a:effectLst/>
+            </c:spPr>
             <c:txPr>
               <a:bodyPr/>
               <a:lstStyle/>
               <a:p>
                 <a:pPr>
-                  <a:defRPr b="0" i="0" strike="noStrike" sz="1000" u="none">
+                  <a:defRPr sz="1000" b="0" i="0" u="none" strike="noStrike">
                     <a:solidFill>
                       <a:srgbClr val="24302A"/>
                     </a:solidFill>
                     <a:latin typeface="Arial"/>
                   </a:defRPr>
                 </a:pPr>
+                <a:endParaRPr lang="es-CL"/>
               </a:p>
             </c:txPr>
             <c:showLegendKey val="0"/>
@@ -448,37 +464,40 @@
             <c:showPercent val="0"/>
             <c:showBubbleSize val="0"/>
             <c:showLeaderLines val="0"/>
+            <c:extLst>
+              <c:ext xmlns:c15="http://schemas.microsoft.com/office/drawing/2012/chart" uri="{CE6537A1-D6FC-4f65-9D91-7224C49458BB}">
+                <c15:showLeaderLines val="0"/>
+              </c:ext>
+            </c:extLst>
           </c:dLbls>
           <c:cat>
-            <c:multiLvlStrRef>
+            <c:strRef>
               <c:f>Sheet1!$A$2:$A$8</c:f>
-              <c:multiLvlStrCache>
+              <c:strCache>
                 <c:ptCount val="7"/>
-                <c:lvl>
-                  <c:pt idx="0">
-                    <c:v>lag 1h</c:v>
-                  </c:pt>
-                  <c:pt idx="1">
-                    <c:v>lag 24h</c:v>
-                  </c:pt>
-                  <c:pt idx="2">
-                    <c:v>día laboral</c:v>
-                  </c:pt>
-                  <c:pt idx="3">
-                    <c:v>hora (cos)</c:v>
-                  </c:pt>
-                  <c:pt idx="4">
-                    <c:v>hora (sin)</c:v>
-                  </c:pt>
-                  <c:pt idx="5">
-                    <c:v>fin de semana</c:v>
-                  </c:pt>
-                  <c:pt idx="6">
-                    <c:v>media 3h</c:v>
-                  </c:pt>
-                </c:lvl>
-              </c:multiLvlStrCache>
-            </c:multiLvlStrRef>
+                <c:pt idx="0">
+                  <c:v>lag 1h</c:v>
+                </c:pt>
+                <c:pt idx="1">
+                  <c:v>lag 24h</c:v>
+                </c:pt>
+                <c:pt idx="2">
+                  <c:v>día laboral</c:v>
+                </c:pt>
+                <c:pt idx="3">
+                  <c:v>hora (cos)</c:v>
+                </c:pt>
+                <c:pt idx="4">
+                  <c:v>hora (sin)</c:v>
+                </c:pt>
+                <c:pt idx="5">
+                  <c:v>fin de semana</c:v>
+                </c:pt>
+                <c:pt idx="6">
+                  <c:v>media 3h</c:v>
+                </c:pt>
+              </c:strCache>
+            </c:strRef>
           </c:cat>
           <c:val>
             <c:numRef>
@@ -487,7 +506,7 @@
                 <c:formatCode>General</c:formatCode>
                 <c:ptCount val="7"/>
                 <c:pt idx="0">
-                  <c:v>0.345</c:v>
+                  <c:v>0.34499999999999997</c:v>
                 </c:pt>
                 <c:pt idx="1">
                   <c:v>0.123</c:v>
@@ -499,47 +518,34 @@
                   <c:v>0.1</c:v>
                 </c:pt>
                 <c:pt idx="4">
-                  <c:v>0.076</c:v>
+                  <c:v>7.5999999999999998E-2</c:v>
                 </c:pt>
                 <c:pt idx="5">
-                  <c:v>0.073</c:v>
+                  <c:v>7.2999999999999995E-2</c:v>
                 </c:pt>
                 <c:pt idx="6">
-                  <c:v>0.053</c:v>
+                  <c:v>5.2999999999999999E-2</c:v>
                 </c:pt>
               </c:numCache>
             </c:numRef>
           </c:val>
+          <c:extLst>
+            <c:ext xmlns:c16="http://schemas.microsoft.com/office/drawing/2014/chart" uri="{C3380CC4-5D6E-409C-BE32-E72D297353CC}">
+              <c16:uniqueId val="{00000000-EEA5-422A-BBA6-EE63E71CBA0F}"/>
+            </c:ext>
+          </c:extLst>
         </c:ser>
         <c:dLbls>
-          <c:numFmt formatCode="#,##0" sourceLinked="0"/>
-          <c:txPr>
-            <a:bodyPr/>
-            <a:lstStyle/>
-            <a:p>
-              <a:pPr>
-                <a:defRPr b="0" i="0" strike="noStrike" sz="1000" u="none">
-                  <a:solidFill>
-                    <a:srgbClr val="24302A"/>
-                  </a:solidFill>
-                  <a:latin typeface="Arial"/>
-                </a:defRPr>
-              </a:pPr>
-            </a:p>
-          </c:txPr>
           <c:showLegendKey val="0"/>
           <c:showVal val="1"/>
           <c:showCatName val="0"/>
           <c:showSerName val="0"/>
           <c:showPercent val="0"/>
           <c:showBubbleSize val="0"/>
-          <c:showLeaderLines val="0"/>
         </c:dLbls>
         <c:gapWidth val="150"/>
-        <c:overlap val="0"/>
         <c:axId val="2094734554"/>
         <c:axId val="2094734552"/>
-        <c:axId val="2094734556"/>
       </c:barChart>
       <c:catAx>
         <c:axId val="2094734554"/>
@@ -580,6 +586,7 @@
         <c:crosses val="autoZero"/>
         <c:auto val="1"/>
         <c:lblAlgn val="ctr"/>
+        <c:lblOffset val="100"/>
         <c:noMultiLvlLbl val="1"/>
       </c:catAx>
       <c:valAx>
@@ -642,6 +649,7 @@
     </c:plotArea>
     <c:plotVisOnly val="1"/>
     <c:dispBlanksAs val="span"/>
+    <c:showDLblsOverMax val="1"/>
   </c:chart>
   <c:spPr>
     <a:noFill/>
@@ -678,234 +686,10 @@
           <a:chExt cx="0" cy="0"/>
         </a:xfrm>
       </p:grpSpPr>
-      <p:sp>
-        <p:nvSpPr>
-          <p:cNvPr id="2" name="Header Placeholder 1"/>
-          <p:cNvSpPr>
-            <a:spLocks noGrp="1"/>
-          </p:cNvSpPr>
-          <p:nvPr>
-            <p:ph type="hdr" sz="quarter"/>
-          </p:nvPr>
-        </p:nvSpPr>
-        <p:spPr>
-          <a:xfrm>
-            <a:off x="0" y="0"/>
-            <a:ext cx="2971800" cy="458788"/>
-          </a:xfrm>
-          <a:prstGeom prst="rect">
-            <a:avLst/>
-          </a:prstGeom>
-        </p:spPr>
-        <p:txBody>
-          <a:bodyPr vert="horz" lIns="91440" tIns="45720" rIns="91440" bIns="45720" rtlCol="0"/>
-          <a:lstStyle>
-            <a:lvl1pPr algn="l">
-              <a:defRPr sz="1200"/>
-            </a:lvl1pPr>
-          </a:lstStyle>
-          <a:p>
-            <a:endParaRPr lang="en-US"/>
-          </a:p>
-        </p:txBody>
-      </p:sp>
-      <p:sp>
-        <p:nvSpPr>
-          <p:cNvPr id="3" name="Date Placeholder 2"/>
-          <p:cNvSpPr>
-            <a:spLocks noGrp="1"/>
-          </p:cNvSpPr>
-          <p:nvPr>
-            <p:ph type="dt" idx="1"/>
-          </p:nvPr>
-        </p:nvSpPr>
-        <p:spPr>
-          <a:xfrm>
-            <a:off x="3884613" y="0"/>
-            <a:ext cx="2971800" cy="458788"/>
-          </a:xfrm>
-          <a:prstGeom prst="rect">
-            <a:avLst/>
-          </a:prstGeom>
-        </p:spPr>
-        <p:txBody>
-          <a:bodyPr vert="horz" lIns="91440" tIns="45720" rIns="91440" bIns="45720" rtlCol="0"/>
-          <a:lstStyle>
-            <a:lvl1pPr algn="r">
-              <a:defRPr sz="1200"/>
-            </a:lvl1pPr>
-          </a:lstStyle>
-          <a:p>
-            <a:fld id="{5282F153-3F37-0F45-9E97-73ACFA13230C}" type="datetimeFigureOut">
-              <a:rPr lang="en-US"/>
-              <a:t>7/23/19</a:t>
-            </a:fld>
-            <a:endParaRPr lang="en-US"/>
-          </a:p>
-        </p:txBody>
-      </p:sp>
-      <p:sp>
-        <p:nvSpPr>
-          <p:cNvPr id="4" name="Slide Image Placeholder 3"/>
-          <p:cNvSpPr>
-            <a:spLocks noGrp="1" noRot="1" noChangeAspect="1"/>
-          </p:cNvSpPr>
-          <p:nvPr>
-            <p:ph type="sldImg" idx="2"/>
-          </p:nvPr>
-        </p:nvSpPr>
-        <p:spPr>
-          <a:xfrm>
-            <a:off x="685800" y="1143000"/>
-            <a:ext cx="5486400" cy="3086100"/>
-          </a:xfrm>
-          <a:prstGeom prst="rect">
-            <a:avLst/>
-          </a:prstGeom>
-          <a:noFill/>
-          <a:ln w="12700">
-            <a:solidFill>
-              <a:prstClr val="black"/>
-            </a:solidFill>
-          </a:ln>
-        </p:spPr>
-        <p:txBody>
-          <a:bodyPr vert="horz" lIns="91440" tIns="45720" rIns="91440" bIns="45720" rtlCol="0" anchor="ctr"/>
-          <a:lstStyle/>
-          <a:p>
-            <a:endParaRPr lang="en-US"/>
-          </a:p>
-        </p:txBody>
-      </p:sp>
-      <p:sp>
-        <p:nvSpPr>
-          <p:cNvPr id="5" name="Notes Placeholder 4"/>
-          <p:cNvSpPr>
-            <a:spLocks noGrp="1"/>
-          </p:cNvSpPr>
-          <p:nvPr>
-            <p:ph type="body" sz="quarter" idx="3"/>
-          </p:nvPr>
-        </p:nvSpPr>
-        <p:spPr>
-          <a:xfrm>
-            <a:off x="685800" y="4400550"/>
-            <a:ext cx="5486400" cy="3600450"/>
-          </a:xfrm>
-          <a:prstGeom prst="rect">
-            <a:avLst/>
-          </a:prstGeom>
-        </p:spPr>
-        <p:txBody>
-          <a:bodyPr vert="horz" lIns="91440" tIns="45720" rIns="91440" bIns="45720" rtlCol="0"/>
-          <a:lstStyle/>
-          <a:p>
-            <a:pPr lvl="0"/>
-            <a:r>
-              <a:rPr lang="en-US"/>
-              <a:t>Click to edit Master text styles</a:t>
-            </a:r>
-          </a:p>
-          <a:p>
-            <a:pPr lvl="1"/>
-            <a:r>
-              <a:rPr lang="en-US"/>
-              <a:t>Second level</a:t>
-            </a:r>
-          </a:p>
-          <a:p>
-            <a:pPr lvl="2"/>
-            <a:r>
-              <a:rPr lang="en-US"/>
-              <a:t>Third level</a:t>
-            </a:r>
-          </a:p>
-          <a:p>
-            <a:pPr lvl="3"/>
-            <a:r>
-              <a:rPr lang="en-US"/>
-              <a:t>Fourth level</a:t>
-            </a:r>
-          </a:p>
-          <a:p>
-            <a:pPr lvl="4"/>
-            <a:r>
-              <a:rPr lang="en-US"/>
-              <a:t>Fifth level</a:t>
-            </a:r>
-          </a:p>
-        </p:txBody>
-      </p:sp>
-      <p:sp>
-        <p:nvSpPr>
-          <p:cNvPr id="6" name="Footer Placeholder 5"/>
-          <p:cNvSpPr>
-            <a:spLocks noGrp="1"/>
-          </p:cNvSpPr>
-          <p:nvPr>
-            <p:ph type="ftr" sz="quarter" idx="4"/>
-          </p:nvPr>
-        </p:nvSpPr>
-        <p:spPr>
-          <a:xfrm>
-            <a:off x="0" y="8685213"/>
-            <a:ext cx="2971800" cy="458787"/>
-          </a:xfrm>
-          <a:prstGeom prst="rect">
-            <a:avLst/>
-          </a:prstGeom>
-        </p:spPr>
-        <p:txBody>
-          <a:bodyPr vert="horz" lIns="91440" tIns="45720" rIns="91440" bIns="45720" rtlCol="0" anchor="b"/>
-          <a:lstStyle>
-            <a:lvl1pPr algn="l">
-              <a:defRPr sz="1200"/>
-            </a:lvl1pPr>
-          </a:lstStyle>
-          <a:p>
-            <a:endParaRPr lang="en-US"/>
-          </a:p>
-        </p:txBody>
-      </p:sp>
-      <p:sp>
-        <p:nvSpPr>
-          <p:cNvPr id="7" name="Slide Number Placeholder 6"/>
-          <p:cNvSpPr>
-            <a:spLocks noGrp="1"/>
-          </p:cNvSpPr>
-          <p:nvPr>
-            <p:ph type="sldNum" sz="quarter" idx="5"/>
-          </p:nvPr>
-        </p:nvSpPr>
-        <p:spPr>
-          <a:xfrm>
-            <a:off x="3884613" y="8685213"/>
-            <a:ext cx="2971800" cy="458787"/>
-          </a:xfrm>
-          <a:prstGeom prst="rect">
-            <a:avLst/>
-          </a:prstGeom>
-        </p:spPr>
-        <p:txBody>
-          <a:bodyPr vert="horz" lIns="91440" tIns="45720" rIns="91440" bIns="45720" rtlCol="0" anchor="b"/>
-          <a:lstStyle>
-            <a:lvl1pPr algn="r">
-              <a:defRPr sz="1200"/>
-            </a:lvl1pPr>
-          </a:lstStyle>
-          <a:p>
-            <a:fld id="{CE5E9CC1-C706-0F49-92D6-E571CC5EEA8F}" type="slidenum">
-              <a:rPr lang="en-US"/>
-              <a:t>‹#›</a:t>
-            </a:fld>
-            <a:endParaRPr lang="en-US"/>
-          </a:p>
-        </p:txBody>
-      </p:sp>
     </p:spTree>
     <p:extLst>
       <p:ext uri="{BB962C8B-B14F-4D97-AF65-F5344CB8AC3E}">
-        <p14:creationId xmlns:p14="http://schemas.microsoft.com/office/powerpoint/2010/main" val="1024086991"/>
+        <p14:creationId xmlns:p14="http://schemas.microsoft.com/office/powerpoint/2010/main" val="721306317"/>
       </p:ext>
     </p:extLst>
   </p:cSld>
@@ -1053,7 +837,6 @@
               <a:rPr lang="en-US" dirty="0"/>
               <a:t>Presentación del proyecto de predicción de demanda de bicicletas. Saludar y presentar al equipo.</a:t>
             </a:r>
-            <a:endParaRPr lang="en-US" dirty="0"/>
           </a:p>
         </p:txBody>
       </p:sp>
@@ -1141,7 +924,6 @@
               <a:rPr lang="en-US" dirty="0"/>
               <a:t>Problema de negocio: anticipar la demanda horaria para operar mejor. El modelo final logra R2=0.96.</a:t>
             </a:r>
-            <a:endParaRPr lang="en-US" dirty="0"/>
           </a:p>
         </p:txBody>
       </p:sp>
@@ -1229,7 +1011,6 @@
               <a:rPr lang="en-US" dirty="0"/>
               <a:t>Tres fuentes reales unidas por datetime. Match del 100% con el clima; dataset final de 17.158 filas.</a:t>
             </a:r>
-            <a:endParaRPr lang="en-US" dirty="0"/>
           </a:p>
         </p:txBody>
       </p:sp>
@@ -1317,7 +1098,6 @@
               <a:rPr lang="en-US" dirty="0"/>
               <a:t>Flujo end-to-end: fuentes → ETL → modelo → API+dashboard. DevOps: Docker, CI, uv.</a:t>
             </a:r>
-            <a:endParaRPr lang="en-US" dirty="0"/>
           </a:p>
         </p:txBody>
       </p:sp>
@@ -1405,7 +1185,6 @@
               <a:rPr lang="en-US" dirty="0"/>
               <a:t>XGBoost gana en todas las métricas. El baseline (predecir la demanda de hace 24h) queda muy por debajo.</a:t>
             </a:r>
-            <a:endParaRPr lang="en-US" dirty="0"/>
           </a:p>
         </p:txBody>
       </p:sp>
@@ -1493,7 +1272,6 @@
               <a:rPr lang="en-US" dirty="0"/>
               <a:t>Las variables autoregresivas dominan; calendario y clima complementan.</a:t>
             </a:r>
-            <a:endParaRPr lang="en-US" dirty="0"/>
           </a:p>
         </p:txBody>
       </p:sp>
@@ -1581,7 +1359,6 @@
               <a:rPr lang="en-US" dirty="0"/>
               <a:t>Demo: dashboard y API. Tener ambos servicios levantados o docker compose up.</a:t>
             </a:r>
-            <a:endParaRPr lang="en-US" dirty="0"/>
           </a:p>
         </p:txBody>
       </p:sp>
@@ -1669,7 +1446,6 @@
               <a:rPr lang="en-US" dirty="0"/>
               <a:t>Resumen de logros y hoja de ruta.</a:t>
             </a:r>
-            <a:endParaRPr lang="en-US" dirty="0"/>
           </a:p>
         </p:txBody>
       </p:sp>
@@ -1757,7 +1533,6 @@
               <a:rPr lang="en-US" dirty="0"/>
               <a:t>Cierre y preguntas. Anticipar: por qué split temporal, cómo evitan fuga, por qué XGBoost, fallback de la API.</a:t>
             </a:r>
-            <a:endParaRPr lang="en-US" dirty="0"/>
           </a:p>
         </p:txBody>
       </p:sp>
@@ -1830,6 +1605,11 @@
 <file path=ppt/slideMasters/slideMaster1.xml><?xml version="1.0" encoding="utf-8"?>
 <p:sldMaster xmlns:a="http://schemas.openxmlformats.org/drawingml/2006/main" xmlns:r="http://schemas.openxmlformats.org/officeDocument/2006/relationships" xmlns:p="http://schemas.openxmlformats.org/presentationml/2006/main">
   <p:cSld>
+    <p:bg>
+      <p:bgRef idx="1001">
+        <a:schemeClr val="bg1"/>
+      </p:bgRef>
+    </p:bg>
     <p:spTree>
       <p:nvGrpSpPr>
         <p:cNvPr id="1" name=""/>
@@ -2112,6 +1892,7 @@
         <a:solidFill>
           <a:srgbClr val="1C3A1C"/>
         </a:solidFill>
+        <a:effectLst/>
       </p:bgPr>
     </p:bg>
     <p:spTree>
@@ -2147,6 +1928,13 @@
           </a:solidFill>
           <a:ln/>
         </p:spPr>
+        <p:txBody>
+          <a:bodyPr/>
+          <a:lstStyle/>
+          <a:p>
+            <a:endParaRPr lang="es-CL"/>
+          </a:p>
+        </p:txBody>
       </p:sp>
       <p:sp>
         <p:nvSpPr>
@@ -2169,7 +1957,7 @@
           <a:bodyPr wrap="square" rtlCol="0" anchor="ctr"/>
           <a:lstStyle/>
           <a:p>
-            <a:pPr algn="l" indent="0" marL="0">
+            <a:pPr marL="0" indent="0" algn="l">
               <a:buNone/>
             </a:pPr>
             <a:r>
@@ -2205,7 +1993,7 @@
           <a:bodyPr wrap="square" rtlCol="0" anchor="ctr"/>
           <a:lstStyle/>
           <a:p>
-            <a:pPr indent="0" marL="0">
+            <a:pPr marL="0" indent="0">
               <a:buNone/>
             </a:pPr>
             <a:r>
@@ -2244,7 +2032,7 @@
           <a:bodyPr wrap="square" rtlCol="0" anchor="ctr"/>
           <a:lstStyle/>
           <a:p>
-            <a:pPr indent="0" marL="0">
+            <a:pPr marL="0" indent="0">
               <a:buNone/>
             </a:pPr>
             <a:r>
@@ -2283,7 +2071,7 @@
           <a:bodyPr wrap="square" rtlCol="0" anchor="ctr"/>
           <a:lstStyle/>
           <a:p>
-            <a:pPr indent="0" marL="0">
+            <a:pPr marL="0" indent="0">
               <a:lnSpc>
                 <a:spcPct val="130000"/>
               </a:lnSpc>
@@ -2303,14 +2091,14 @@
             <a:endParaRPr lang="en-US" sz="1500" dirty="0"/>
           </a:p>
           <a:p>
-            <a:pPr indent="0" marL="0">
+            <a:pPr marL="0" indent="0">
               <a:lnSpc>
                 <a:spcPct val="130000"/>
               </a:lnSpc>
               <a:buNone/>
             </a:pPr>
             <a:r>
-              <a:rPr lang="en-US" sz="1500" dirty="0">
+              <a:rPr lang="en-US" sz="1500" dirty="0" err="1">
                 <a:solidFill>
                   <a:srgbClr val="C9D6C2"/>
                 </a:solidFill>
@@ -2318,9 +2106,118 @@
                 <a:ea typeface="Calibri" pitchFamily="34" charset="-122"/>
                 <a:cs typeface="Calibri" pitchFamily="34" charset="-120"/>
               </a:rPr>
-              <a:t>Integrantes: (completar)</a:t>
-            </a:r>
-            <a:endParaRPr lang="en-US" sz="1500" dirty="0"/>
+              <a:t>Integrantes</a:t>
+            </a:r>
+            <a:r>
+              <a:rPr lang="en-US" sz="1500" dirty="0">
+                <a:solidFill>
+                  <a:srgbClr val="C9D6C2"/>
+                </a:solidFill>
+                <a:latin typeface="Calibri" pitchFamily="34" charset="0"/>
+                <a:ea typeface="Calibri" pitchFamily="34" charset="-122"/>
+                <a:cs typeface="Calibri" pitchFamily="34" charset="-120"/>
+              </a:rPr>
+              <a:t>:</a:t>
+            </a:r>
+          </a:p>
+          <a:p>
+            <a:pPr marL="285750" indent="-285750">
+              <a:lnSpc>
+                <a:spcPct val="130000"/>
+              </a:lnSpc>
+              <a:buFontTx/>
+              <a:buChar char="-"/>
+            </a:pPr>
+            <a:r>
+              <a:rPr lang="en-US" sz="1500" dirty="0">
+                <a:solidFill>
+                  <a:srgbClr val="C9D6C2"/>
+                </a:solidFill>
+                <a:latin typeface="Calibri" pitchFamily="34" charset="0"/>
+                <a:ea typeface="Calibri" pitchFamily="34" charset="-122"/>
+                <a:cs typeface="Calibri" pitchFamily="34" charset="-120"/>
+              </a:rPr>
+              <a:t>Sebastián González Pino</a:t>
+            </a:r>
+          </a:p>
+          <a:p>
+            <a:pPr marL="285750" indent="-285750">
+              <a:lnSpc>
+                <a:spcPct val="130000"/>
+              </a:lnSpc>
+              <a:buFontTx/>
+              <a:buChar char="-"/>
+            </a:pPr>
+            <a:r>
+              <a:rPr lang="en-US" sz="1500" dirty="0">
+                <a:solidFill>
+                  <a:srgbClr val="C9D6C2"/>
+                </a:solidFill>
+                <a:latin typeface="Calibri" pitchFamily="34" charset="0"/>
+                <a:ea typeface="Calibri" pitchFamily="34" charset="-122"/>
+                <a:cs typeface="Calibri" pitchFamily="34" charset="-120"/>
+              </a:rPr>
+              <a:t>Hernan Lippke</a:t>
+            </a:r>
+          </a:p>
+          <a:p>
+            <a:pPr marL="285750" indent="-285750">
+              <a:lnSpc>
+                <a:spcPct val="130000"/>
+              </a:lnSpc>
+              <a:buFontTx/>
+              <a:buChar char="-"/>
+            </a:pPr>
+            <a:r>
+              <a:rPr lang="en-US" sz="1500" dirty="0">
+                <a:solidFill>
+                  <a:srgbClr val="C9D6C2"/>
+                </a:solidFill>
+                <a:latin typeface="Calibri" pitchFamily="34" charset="0"/>
+                <a:ea typeface="Calibri" pitchFamily="34" charset="-122"/>
+                <a:cs typeface="Calibri" pitchFamily="34" charset="-120"/>
+              </a:rPr>
+              <a:t>Matias Arauz</a:t>
+            </a:r>
+          </a:p>
+          <a:p>
+            <a:pPr marL="285750" indent="-285750">
+              <a:lnSpc>
+                <a:spcPct val="130000"/>
+              </a:lnSpc>
+              <a:buFontTx/>
+              <a:buChar char="-"/>
+            </a:pPr>
+            <a:r>
+              <a:rPr lang="en-US" sz="1500" dirty="0">
+                <a:solidFill>
+                  <a:srgbClr val="C9D6C2"/>
+                </a:solidFill>
+                <a:latin typeface="Calibri" pitchFamily="34" charset="0"/>
+                <a:ea typeface="Calibri" pitchFamily="34" charset="-122"/>
+                <a:cs typeface="Calibri" pitchFamily="34" charset="-120"/>
+              </a:rPr>
+              <a:t>Michelangelo </a:t>
+            </a:r>
+            <a:r>
+              <a:rPr lang="en-US" sz="1500" dirty="0" err="1">
+                <a:solidFill>
+                  <a:srgbClr val="C9D6C2"/>
+                </a:solidFill>
+                <a:latin typeface="Calibri" pitchFamily="34" charset="0"/>
+                <a:ea typeface="Calibri" pitchFamily="34" charset="-122"/>
+                <a:cs typeface="Calibri" pitchFamily="34" charset="-120"/>
+              </a:rPr>
+              <a:t>Bandelli</a:t>
+            </a:r>
+            <a:endParaRPr lang="en-US" sz="1500" dirty="0">
+              <a:solidFill>
+                <a:srgbClr val="C9D6C2"/>
+              </a:solidFill>
+              <a:latin typeface="Calibri" pitchFamily="34" charset="0"/>
+              <a:ea typeface="Calibri" pitchFamily="34" charset="-122"/>
+              <a:cs typeface="Calibri" pitchFamily="34" charset="-120"/>
+            </a:endParaRPr>
           </a:p>
         </p:txBody>
       </p:sp>
@@ -2340,6 +2237,7 @@
         <a:solidFill>
           <a:srgbClr val="FFFFFF"/>
         </a:solidFill>
+        <a:effectLst/>
       </p:bgPr>
     </p:bg>
     <p:spTree>
@@ -2377,7 +2275,7 @@
           <a:bodyPr wrap="square" rtlCol="0" anchor="ctr"/>
           <a:lstStyle/>
           <a:p>
-            <a:pPr indent="0" marL="0">
+            <a:pPr marL="0" indent="0">
               <a:buNone/>
             </a:pPr>
             <a:r>
@@ -2416,7 +2314,7 @@
           <a:bodyPr wrap="square" rtlCol="0" anchor="ctr"/>
           <a:lstStyle/>
           <a:p>
-            <a:pPr indent="0" marL="0">
+            <a:pPr marL="0" indent="0">
               <a:buNone/>
             </a:pPr>
             <a:r>
@@ -2460,13 +2358,20 @@
             <a:prstDash val="solid"/>
           </a:ln>
           <a:effectLst>
-            <a:outerShdw sx="100000" sy="100000" kx="0" ky="0" algn="bl" rotWithShape="0" blurRad="76200" dist="25400" dir="5400000">
+            <a:outerShdw blurRad="76200" dist="25400" dir="5400000" algn="bl" rotWithShape="0">
               <a:srgbClr val="9AA69A">
                 <a:alpha val="35000"/>
               </a:srgbClr>
             </a:outerShdw>
           </a:effectLst>
         </p:spPr>
+        <p:txBody>
+          <a:bodyPr/>
+          <a:lstStyle/>
+          <a:p>
+            <a:endParaRPr lang="es-CL"/>
+          </a:p>
+        </p:txBody>
       </p:sp>
       <p:sp>
         <p:nvSpPr>
@@ -2487,6 +2392,13 @@
           </a:solidFill>
           <a:ln/>
         </p:spPr>
+        <p:txBody>
+          <a:bodyPr/>
+          <a:lstStyle/>
+          <a:p>
+            <a:endParaRPr lang="es-CL"/>
+          </a:p>
+        </p:txBody>
       </p:sp>
       <p:sp>
         <p:nvSpPr>
@@ -2509,7 +2421,7 @@
           <a:bodyPr wrap="square" rtlCol="0" anchor="ctr"/>
           <a:lstStyle/>
           <a:p>
-            <a:pPr algn="ctr" indent="0" marL="0">
+            <a:pPr marL="0" indent="0" algn="ctr">
               <a:buNone/>
             </a:pPr>
             <a:r>
@@ -2545,7 +2457,7 @@
           <a:bodyPr wrap="square" rtlCol="0" anchor="ctr"/>
           <a:lstStyle/>
           <a:p>
-            <a:pPr indent="0" marL="0">
+            <a:pPr marL="0" indent="0">
               <a:buNone/>
             </a:pPr>
             <a:r>
@@ -2584,7 +2496,7 @@
           <a:bodyPr wrap="square" rtlCol="0" anchor="ctr"/>
           <a:lstStyle/>
           <a:p>
-            <a:pPr indent="0" marL="0">
+            <a:pPr marL="0" indent="0">
               <a:buNone/>
             </a:pPr>
             <a:r>
@@ -2628,13 +2540,20 @@
             <a:prstDash val="solid"/>
           </a:ln>
           <a:effectLst>
-            <a:outerShdw sx="100000" sy="100000" kx="0" ky="0" algn="bl" rotWithShape="0" blurRad="76200" dist="25400" dir="5400000">
+            <a:outerShdw blurRad="76200" dist="25400" dir="5400000" algn="bl" rotWithShape="0">
               <a:srgbClr val="9AA69A">
                 <a:alpha val="35000"/>
               </a:srgbClr>
             </a:outerShdw>
           </a:effectLst>
         </p:spPr>
+        <p:txBody>
+          <a:bodyPr/>
+          <a:lstStyle/>
+          <a:p>
+            <a:endParaRPr lang="es-CL"/>
+          </a:p>
+        </p:txBody>
       </p:sp>
       <p:sp>
         <p:nvSpPr>
@@ -2655,6 +2574,13 @@
           </a:solidFill>
           <a:ln/>
         </p:spPr>
+        <p:txBody>
+          <a:bodyPr/>
+          <a:lstStyle/>
+          <a:p>
+            <a:endParaRPr lang="es-CL"/>
+          </a:p>
+        </p:txBody>
       </p:sp>
       <p:sp>
         <p:nvSpPr>
@@ -2677,7 +2603,7 @@
           <a:bodyPr wrap="square" rtlCol="0" anchor="ctr"/>
           <a:lstStyle/>
           <a:p>
-            <a:pPr algn="ctr" indent="0" marL="0">
+            <a:pPr marL="0" indent="0" algn="ctr">
               <a:buNone/>
             </a:pPr>
             <a:r>
@@ -2713,7 +2639,7 @@
           <a:bodyPr wrap="square" rtlCol="0" anchor="ctr"/>
           <a:lstStyle/>
           <a:p>
-            <a:pPr indent="0" marL="0">
+            <a:pPr marL="0" indent="0">
               <a:buNone/>
             </a:pPr>
             <a:r>
@@ -2752,7 +2678,7 @@
           <a:bodyPr wrap="square" rtlCol="0" anchor="ctr"/>
           <a:lstStyle/>
           <a:p>
-            <a:pPr indent="0" marL="0">
+            <a:pPr marL="0" indent="0">
               <a:buNone/>
             </a:pPr>
             <a:r>
@@ -2796,13 +2722,20 @@
             <a:prstDash val="solid"/>
           </a:ln>
           <a:effectLst>
-            <a:outerShdw sx="100000" sy="100000" kx="0" ky="0" algn="bl" rotWithShape="0" blurRad="76200" dist="25400" dir="5400000">
+            <a:outerShdw blurRad="76200" dist="25400" dir="5400000" algn="bl" rotWithShape="0">
               <a:srgbClr val="9AA69A">
                 <a:alpha val="35000"/>
               </a:srgbClr>
             </a:outerShdw>
           </a:effectLst>
         </p:spPr>
+        <p:txBody>
+          <a:bodyPr/>
+          <a:lstStyle/>
+          <a:p>
+            <a:endParaRPr lang="es-CL"/>
+          </a:p>
+        </p:txBody>
       </p:sp>
       <p:sp>
         <p:nvSpPr>
@@ -2823,6 +2756,13 @@
           </a:solidFill>
           <a:ln/>
         </p:spPr>
+        <p:txBody>
+          <a:bodyPr/>
+          <a:lstStyle/>
+          <a:p>
+            <a:endParaRPr lang="es-CL"/>
+          </a:p>
+        </p:txBody>
       </p:sp>
       <p:sp>
         <p:nvSpPr>
@@ -2845,7 +2785,7 @@
           <a:bodyPr wrap="square" rtlCol="0" anchor="ctr"/>
           <a:lstStyle/>
           <a:p>
-            <a:pPr algn="ctr" indent="0" marL="0">
+            <a:pPr marL="0" indent="0" algn="ctr">
               <a:buNone/>
             </a:pPr>
             <a:r>
@@ -2881,7 +2821,7 @@
           <a:bodyPr wrap="square" rtlCol="0" anchor="ctr"/>
           <a:lstStyle/>
           <a:p>
-            <a:pPr indent="0" marL="0">
+            <a:pPr marL="0" indent="0">
               <a:buNone/>
             </a:pPr>
             <a:r>
@@ -2920,7 +2860,7 @@
           <a:bodyPr wrap="square" rtlCol="0" anchor="ctr"/>
           <a:lstStyle/>
           <a:p>
-            <a:pPr indent="0" marL="0">
+            <a:pPr marL="0" indent="0">
               <a:buNone/>
             </a:pPr>
             <a:r>
@@ -2964,13 +2904,20 @@
             <a:prstDash val="solid"/>
           </a:ln>
           <a:effectLst>
-            <a:outerShdw sx="100000" sy="100000" kx="0" ky="0" algn="bl" rotWithShape="0" blurRad="76200" dist="25400" dir="5400000">
+            <a:outerShdw blurRad="76200" dist="25400" dir="5400000" algn="bl" rotWithShape="0">
               <a:srgbClr val="9AA69A">
                 <a:alpha val="35000"/>
               </a:srgbClr>
             </a:outerShdw>
           </a:effectLst>
         </p:spPr>
+        <p:txBody>
+          <a:bodyPr/>
+          <a:lstStyle/>
+          <a:p>
+            <a:endParaRPr lang="es-CL"/>
+          </a:p>
+        </p:txBody>
       </p:sp>
       <p:sp>
         <p:nvSpPr>
@@ -2993,7 +2940,7 @@
           <a:bodyPr wrap="square" rtlCol="0" anchor="ctr"/>
           <a:lstStyle/>
           <a:p>
-            <a:pPr algn="ctr" indent="0" marL="0">
+            <a:pPr marL="0" indent="0" algn="ctr">
               <a:buNone/>
             </a:pPr>
             <a:r>
@@ -3032,7 +2979,7 @@
           <a:bodyPr wrap="square" rtlCol="0" anchor="ctr"/>
           <a:lstStyle/>
           <a:p>
-            <a:pPr algn="ctr" indent="0" marL="0">
+            <a:pPr marL="0" indent="0" algn="ctr">
               <a:buNone/>
             </a:pPr>
             <a:r>
@@ -3066,6 +3013,7 @@
         <a:solidFill>
           <a:srgbClr val="FFFFFF"/>
         </a:solidFill>
+        <a:effectLst/>
       </p:bgPr>
     </p:bg>
     <p:spTree>
@@ -3103,7 +3051,7 @@
           <a:bodyPr wrap="square" rtlCol="0" anchor="ctr"/>
           <a:lstStyle/>
           <a:p>
-            <a:pPr indent="0" marL="0">
+            <a:pPr marL="0" indent="0">
               <a:buNone/>
             </a:pPr>
             <a:r>
@@ -3147,13 +3095,20 @@
             <a:prstDash val="solid"/>
           </a:ln>
           <a:effectLst>
-            <a:outerShdw sx="100000" sy="100000" kx="0" ky="0" algn="bl" rotWithShape="0" blurRad="76200" dist="25400" dir="5400000">
+            <a:outerShdw blurRad="76200" dist="25400" dir="5400000" algn="bl" rotWithShape="0">
               <a:srgbClr val="9AA69A">
                 <a:alpha val="35000"/>
               </a:srgbClr>
             </a:outerShdw>
           </a:effectLst>
         </p:spPr>
+        <p:txBody>
+          <a:bodyPr/>
+          <a:lstStyle/>
+          <a:p>
+            <a:endParaRPr lang="es-CL"/>
+          </a:p>
+        </p:txBody>
       </p:sp>
       <p:sp>
         <p:nvSpPr>
@@ -3174,6 +3129,13 @@
           </a:solidFill>
           <a:ln/>
         </p:spPr>
+        <p:txBody>
+          <a:bodyPr/>
+          <a:lstStyle/>
+          <a:p>
+            <a:endParaRPr lang="es-CL"/>
+          </a:p>
+        </p:txBody>
       </p:sp>
       <p:sp>
         <p:nvSpPr>
@@ -3196,7 +3158,7 @@
           <a:bodyPr wrap="square" rtlCol="0" anchor="ctr"/>
           <a:lstStyle/>
           <a:p>
-            <a:pPr algn="ctr" indent="0" marL="0">
+            <a:pPr marL="0" indent="0" algn="ctr">
               <a:buNone/>
             </a:pPr>
             <a:r>
@@ -3232,7 +3194,7 @@
           <a:bodyPr wrap="square" rtlCol="0" anchor="ctr"/>
           <a:lstStyle/>
           <a:p>
-            <a:pPr indent="0" marL="0">
+            <a:pPr marL="0" indent="0">
               <a:buNone/>
             </a:pPr>
             <a:r>
@@ -3271,7 +3233,7 @@
           <a:bodyPr wrap="square" rtlCol="0" anchor="ctr"/>
           <a:lstStyle/>
           <a:p>
-            <a:pPr indent="0" marL="0">
+            <a:pPr marL="0" indent="0">
               <a:buNone/>
             </a:pPr>
             <a:r>
@@ -3310,7 +3272,7 @@
           <a:bodyPr wrap="square" rtlCol="0" anchor="ctr"/>
           <a:lstStyle/>
           <a:p>
-            <a:pPr indent="0" marL="0">
+            <a:pPr marL="0" indent="0">
               <a:buNone/>
             </a:pPr>
             <a:r>
@@ -3354,13 +3316,20 @@
             <a:prstDash val="solid"/>
           </a:ln>
           <a:effectLst>
-            <a:outerShdw sx="100000" sy="100000" kx="0" ky="0" algn="bl" rotWithShape="0" blurRad="76200" dist="25400" dir="5400000">
+            <a:outerShdw blurRad="76200" dist="25400" dir="5400000" algn="bl" rotWithShape="0">
               <a:srgbClr val="9AA69A">
                 <a:alpha val="35000"/>
               </a:srgbClr>
             </a:outerShdw>
           </a:effectLst>
         </p:spPr>
+        <p:txBody>
+          <a:bodyPr/>
+          <a:lstStyle/>
+          <a:p>
+            <a:endParaRPr lang="es-CL"/>
+          </a:p>
+        </p:txBody>
       </p:sp>
       <p:sp>
         <p:nvSpPr>
@@ -3381,6 +3350,13 @@
           </a:solidFill>
           <a:ln/>
         </p:spPr>
+        <p:txBody>
+          <a:bodyPr/>
+          <a:lstStyle/>
+          <a:p>
+            <a:endParaRPr lang="es-CL"/>
+          </a:p>
+        </p:txBody>
       </p:sp>
       <p:sp>
         <p:nvSpPr>
@@ -3403,7 +3379,7 @@
           <a:bodyPr wrap="square" rtlCol="0" anchor="ctr"/>
           <a:lstStyle/>
           <a:p>
-            <a:pPr algn="ctr" indent="0" marL="0">
+            <a:pPr marL="0" indent="0" algn="ctr">
               <a:buNone/>
             </a:pPr>
             <a:r>
@@ -3439,7 +3415,7 @@
           <a:bodyPr wrap="square" rtlCol="0" anchor="ctr"/>
           <a:lstStyle/>
           <a:p>
-            <a:pPr indent="0" marL="0">
+            <a:pPr marL="0" indent="0">
               <a:buNone/>
             </a:pPr>
             <a:r>
@@ -3478,7 +3454,7 @@
           <a:bodyPr wrap="square" rtlCol="0" anchor="ctr"/>
           <a:lstStyle/>
           <a:p>
-            <a:pPr indent="0" marL="0">
+            <a:pPr marL="0" indent="0">
               <a:buNone/>
             </a:pPr>
             <a:r>
@@ -3517,7 +3493,7 @@
           <a:bodyPr wrap="square" rtlCol="0" anchor="ctr"/>
           <a:lstStyle/>
           <a:p>
-            <a:pPr indent="0" marL="0">
+            <a:pPr marL="0" indent="0">
               <a:buNone/>
             </a:pPr>
             <a:r>
@@ -3561,13 +3537,20 @@
             <a:prstDash val="solid"/>
           </a:ln>
           <a:effectLst>
-            <a:outerShdw sx="100000" sy="100000" kx="0" ky="0" algn="bl" rotWithShape="0" blurRad="76200" dist="25400" dir="5400000">
+            <a:outerShdw blurRad="76200" dist="25400" dir="5400000" algn="bl" rotWithShape="0">
               <a:srgbClr val="9AA69A">
                 <a:alpha val="35000"/>
               </a:srgbClr>
             </a:outerShdw>
           </a:effectLst>
         </p:spPr>
+        <p:txBody>
+          <a:bodyPr/>
+          <a:lstStyle/>
+          <a:p>
+            <a:endParaRPr lang="es-CL"/>
+          </a:p>
+        </p:txBody>
       </p:sp>
       <p:sp>
         <p:nvSpPr>
@@ -3588,6 +3571,13 @@
           </a:solidFill>
           <a:ln/>
         </p:spPr>
+        <p:txBody>
+          <a:bodyPr/>
+          <a:lstStyle/>
+          <a:p>
+            <a:endParaRPr lang="es-CL"/>
+          </a:p>
+        </p:txBody>
       </p:sp>
       <p:sp>
         <p:nvSpPr>
@@ -3610,7 +3600,7 @@
           <a:bodyPr wrap="square" rtlCol="0" anchor="ctr"/>
           <a:lstStyle/>
           <a:p>
-            <a:pPr algn="ctr" indent="0" marL="0">
+            <a:pPr marL="0" indent="0" algn="ctr">
               <a:buNone/>
             </a:pPr>
             <a:r>
@@ -3646,7 +3636,7 @@
           <a:bodyPr wrap="square" rtlCol="0" anchor="ctr"/>
           <a:lstStyle/>
           <a:p>
-            <a:pPr indent="0" marL="0">
+            <a:pPr marL="0" indent="0">
               <a:buNone/>
             </a:pPr>
             <a:r>
@@ -3685,7 +3675,7 @@
           <a:bodyPr wrap="square" rtlCol="0" anchor="ctr"/>
           <a:lstStyle/>
           <a:p>
-            <a:pPr indent="0" marL="0">
+            <a:pPr marL="0" indent="0">
               <a:buNone/>
             </a:pPr>
             <a:r>
@@ -3724,7 +3714,7 @@
           <a:bodyPr wrap="square" rtlCol="0" anchor="ctr"/>
           <a:lstStyle/>
           <a:p>
-            <a:pPr indent="0" marL="0">
+            <a:pPr marL="0" indent="0">
               <a:buNone/>
             </a:pPr>
             <a:r>
@@ -3768,13 +3758,20 @@
             <a:prstDash val="solid"/>
           </a:ln>
           <a:effectLst>
-            <a:outerShdw sx="100000" sy="100000" kx="0" ky="0" algn="bl" rotWithShape="0" blurRad="76200" dist="25400" dir="5400000">
+            <a:outerShdw blurRad="76200" dist="25400" dir="5400000" algn="bl" rotWithShape="0">
               <a:srgbClr val="9AA69A">
                 <a:alpha val="35000"/>
               </a:srgbClr>
             </a:outerShdw>
           </a:effectLst>
         </p:spPr>
+        <p:txBody>
+          <a:bodyPr/>
+          <a:lstStyle/>
+          <a:p>
+            <a:endParaRPr lang="es-CL"/>
+          </a:p>
+        </p:txBody>
       </p:sp>
       <p:sp>
         <p:nvSpPr>
@@ -3797,7 +3794,7 @@
           <a:bodyPr wrap="square" rtlCol="0" anchor="ctr"/>
           <a:lstStyle/>
           <a:p>
-            <a:pPr indent="0" marL="0">
+            <a:pPr marL="0" indent="0">
               <a:buNone/>
             </a:pPr>
             <a:r>
@@ -3836,7 +3833,7 @@
           <a:bodyPr wrap="square" rtlCol="0" anchor="ctr"/>
           <a:lstStyle/>
           <a:p>
-            <a:pPr indent="0" marL="0">
+            <a:pPr marL="0" indent="0">
               <a:buNone/>
             </a:pPr>
             <a:r>
@@ -3875,7 +3872,7 @@
           <a:bodyPr wrap="square" rtlCol="0" anchor="ctr"/>
           <a:lstStyle/>
           <a:p>
-            <a:pPr indent="0" marL="0">
+            <a:pPr marL="0" indent="0">
               <a:buNone/>
             </a:pPr>
             <a:r>
@@ -3914,7 +3911,7 @@
           <a:bodyPr wrap="square" rtlCol="0" anchor="ctr"/>
           <a:lstStyle/>
           <a:p>
-            <a:pPr indent="0" marL="0">
+            <a:pPr marL="0" indent="0">
               <a:buNone/>
             </a:pPr>
             <a:r>
@@ -3953,7 +3950,7 @@
           <a:bodyPr wrap="square" rtlCol="0" anchor="ctr"/>
           <a:lstStyle/>
           <a:p>
-            <a:pPr indent="0" marL="0">
+            <a:pPr marL="0" indent="0">
               <a:buNone/>
             </a:pPr>
             <a:r>
@@ -3992,7 +3989,7 @@
           <a:bodyPr wrap="square" rtlCol="0" anchor="ctr"/>
           <a:lstStyle/>
           <a:p>
-            <a:pPr indent="0" marL="0">
+            <a:pPr marL="0" indent="0">
               <a:buNone/>
             </a:pPr>
             <a:r>
@@ -4031,7 +4028,7 @@
           <a:bodyPr wrap="square" rtlCol="0" anchor="ctr"/>
           <a:lstStyle/>
           <a:p>
-            <a:pPr indent="0" marL="0">
+            <a:pPr marL="0" indent="0">
               <a:buNone/>
             </a:pPr>
             <a:r>
@@ -4070,7 +4067,7 @@
           <a:bodyPr wrap="square" rtlCol="0" anchor="ctr"/>
           <a:lstStyle/>
           <a:p>
-            <a:pPr indent="0" marL="0">
+            <a:pPr marL="0" indent="0">
               <a:buNone/>
             </a:pPr>
             <a:r>
@@ -4109,7 +4106,7 @@
           <a:bodyPr wrap="square" rtlCol="0" anchor="ctr"/>
           <a:lstStyle/>
           <a:p>
-            <a:pPr indent="0" marL="0">
+            <a:pPr marL="0" indent="0">
               <a:buNone/>
             </a:pPr>
             <a:r>
@@ -4143,6 +4140,7 @@
         <a:solidFill>
           <a:srgbClr val="FFFFFF"/>
         </a:solidFill>
+        <a:effectLst/>
       </p:bgPr>
     </p:bg>
     <p:spTree>
@@ -4180,7 +4178,7 @@
           <a:bodyPr wrap="square" rtlCol="0" anchor="ctr"/>
           <a:lstStyle/>
           <a:p>
-            <a:pPr indent="0" marL="0">
+            <a:pPr marL="0" indent="0">
               <a:buNone/>
             </a:pPr>
             <a:r>
@@ -4224,13 +4222,20 @@
             <a:prstDash val="solid"/>
           </a:ln>
           <a:effectLst>
-            <a:outerShdw sx="100000" sy="100000" kx="0" ky="0" algn="bl" rotWithShape="0" blurRad="76200" dist="25400" dir="5400000">
+            <a:outerShdw blurRad="76200" dist="25400" dir="5400000" algn="bl" rotWithShape="0">
               <a:srgbClr val="9AA69A">
                 <a:alpha val="35000"/>
               </a:srgbClr>
             </a:outerShdw>
           </a:effectLst>
         </p:spPr>
+        <p:txBody>
+          <a:bodyPr/>
+          <a:lstStyle/>
+          <a:p>
+            <a:endParaRPr lang="es-CL"/>
+          </a:p>
+        </p:txBody>
       </p:sp>
       <p:sp>
         <p:nvSpPr>
@@ -4253,7 +4258,7 @@
           <a:bodyPr wrap="square" rtlCol="0" anchor="ctr"/>
           <a:lstStyle/>
           <a:p>
-            <a:pPr algn="ctr" indent="0" marL="0">
+            <a:pPr marL="0" indent="0" algn="ctr">
               <a:buNone/>
             </a:pPr>
             <a:r>
@@ -4292,7 +4297,7 @@
           <a:bodyPr wrap="square" rtlCol="0" anchor="ctr"/>
           <a:lstStyle/>
           <a:p>
-            <a:pPr algn="ctr" indent="0" marL="0">
+            <a:pPr marL="0" indent="0" algn="ctr">
               <a:buNone/>
             </a:pPr>
             <a:r>
@@ -4331,7 +4336,7 @@
           <a:bodyPr wrap="square" rtlCol="0" anchor="ctr"/>
           <a:lstStyle/>
           <a:p>
-            <a:pPr algn="ctr" indent="0" marL="0">
+            <a:pPr marL="0" indent="0" algn="ctr">
               <a:buNone/>
             </a:pPr>
             <a:r>
@@ -4372,13 +4377,20 @@
             <a:prstDash val="solid"/>
           </a:ln>
           <a:effectLst>
-            <a:outerShdw sx="100000" sy="100000" kx="0" ky="0" algn="bl" rotWithShape="0" blurRad="76200" dist="25400" dir="5400000">
+            <a:outerShdw blurRad="76200" dist="25400" dir="5400000" algn="bl" rotWithShape="0">
               <a:srgbClr val="9AA69A">
                 <a:alpha val="35000"/>
               </a:srgbClr>
             </a:outerShdw>
           </a:effectLst>
         </p:spPr>
+        <p:txBody>
+          <a:bodyPr/>
+          <a:lstStyle/>
+          <a:p>
+            <a:endParaRPr lang="es-CL"/>
+          </a:p>
+        </p:txBody>
       </p:sp>
       <p:sp>
         <p:nvSpPr>
@@ -4401,7 +4413,7 @@
           <a:bodyPr wrap="square" rtlCol="0" anchor="ctr"/>
           <a:lstStyle/>
           <a:p>
-            <a:pPr algn="ctr" indent="0" marL="0">
+            <a:pPr marL="0" indent="0" algn="ctr">
               <a:buNone/>
             </a:pPr>
             <a:r>
@@ -4440,7 +4452,7 @@
           <a:bodyPr wrap="square" rtlCol="0" anchor="ctr"/>
           <a:lstStyle/>
           <a:p>
-            <a:pPr algn="ctr" indent="0" marL="0">
+            <a:pPr marL="0" indent="0" algn="ctr">
               <a:buNone/>
             </a:pPr>
             <a:r>
@@ -4479,7 +4491,7 @@
           <a:bodyPr wrap="square" rtlCol="0" anchor="ctr"/>
           <a:lstStyle/>
           <a:p>
-            <a:pPr algn="ctr" indent="0" marL="0">
+            <a:pPr marL="0" indent="0" algn="ctr">
               <a:buNone/>
             </a:pPr>
             <a:r>
@@ -4520,13 +4532,20 @@
             <a:prstDash val="solid"/>
           </a:ln>
           <a:effectLst>
-            <a:outerShdw sx="100000" sy="100000" kx="0" ky="0" algn="bl" rotWithShape="0" blurRad="76200" dist="25400" dir="5400000">
+            <a:outerShdw blurRad="76200" dist="25400" dir="5400000" algn="bl" rotWithShape="0">
               <a:srgbClr val="9AA69A">
                 <a:alpha val="35000"/>
               </a:srgbClr>
             </a:outerShdw>
           </a:effectLst>
         </p:spPr>
+        <p:txBody>
+          <a:bodyPr/>
+          <a:lstStyle/>
+          <a:p>
+            <a:endParaRPr lang="es-CL"/>
+          </a:p>
+        </p:txBody>
       </p:sp>
       <p:sp>
         <p:nvSpPr>
@@ -4549,7 +4568,7 @@
           <a:bodyPr wrap="square" rtlCol="0" anchor="ctr"/>
           <a:lstStyle/>
           <a:p>
-            <a:pPr algn="ctr" indent="0" marL="0">
+            <a:pPr marL="0" indent="0" algn="ctr">
               <a:buNone/>
             </a:pPr>
             <a:r>
@@ -4588,7 +4607,7 @@
           <a:bodyPr wrap="square" rtlCol="0" anchor="ctr"/>
           <a:lstStyle/>
           <a:p>
-            <a:pPr algn="ctr" indent="0" marL="0">
+            <a:pPr marL="0" indent="0" algn="ctr">
               <a:buNone/>
             </a:pPr>
             <a:r>
@@ -4627,7 +4646,7 @@
           <a:bodyPr wrap="square" rtlCol="0" anchor="ctr"/>
           <a:lstStyle/>
           <a:p>
-            <a:pPr algn="ctr" indent="0" marL="0">
+            <a:pPr marL="0" indent="0" algn="ctr">
               <a:buNone/>
             </a:pPr>
             <a:r>
@@ -4668,13 +4687,20 @@
             <a:prstDash val="solid"/>
           </a:ln>
           <a:effectLst>
-            <a:outerShdw sx="100000" sy="100000" kx="0" ky="0" algn="bl" rotWithShape="0" blurRad="76200" dist="25400" dir="5400000">
+            <a:outerShdw blurRad="76200" dist="25400" dir="5400000" algn="bl" rotWithShape="0">
               <a:srgbClr val="9AA69A">
                 <a:alpha val="35000"/>
               </a:srgbClr>
             </a:outerShdw>
           </a:effectLst>
         </p:spPr>
+        <p:txBody>
+          <a:bodyPr/>
+          <a:lstStyle/>
+          <a:p>
+            <a:endParaRPr lang="es-CL"/>
+          </a:p>
+        </p:txBody>
       </p:sp>
       <p:sp>
         <p:nvSpPr>
@@ -4697,7 +4723,7 @@
           <a:bodyPr wrap="square" rtlCol="0" anchor="ctr"/>
           <a:lstStyle/>
           <a:p>
-            <a:pPr algn="ctr" indent="0" marL="0">
+            <a:pPr marL="0" indent="0" algn="ctr">
               <a:buNone/>
             </a:pPr>
             <a:r>
@@ -4736,7 +4762,7 @@
           <a:bodyPr wrap="square" rtlCol="0" anchor="ctr"/>
           <a:lstStyle/>
           <a:p>
-            <a:pPr algn="ctr" indent="0" marL="0">
+            <a:pPr marL="0" indent="0" algn="ctr">
               <a:buNone/>
             </a:pPr>
             <a:r>
@@ -4773,6 +4799,13 @@
           </a:solidFill>
           <a:ln/>
         </p:spPr>
+        <p:txBody>
+          <a:bodyPr/>
+          <a:lstStyle/>
+          <a:p>
+            <a:endParaRPr lang="es-CL"/>
+          </a:p>
+        </p:txBody>
       </p:sp>
       <p:sp>
         <p:nvSpPr>
@@ -4795,7 +4828,7 @@
           <a:bodyPr wrap="square" rtlCol="0" anchor="ctr"/>
           <a:lstStyle/>
           <a:p>
-            <a:pPr indent="0" marL="0">
+            <a:pPr marL="0" indent="0">
               <a:buNone/>
             </a:pPr>
             <a:r>
@@ -4834,7 +4867,7 @@
           <a:bodyPr wrap="square" rtlCol="0" anchor="ctr"/>
           <a:lstStyle/>
           <a:p>
-            <a:pPr indent="0" marL="0">
+            <a:pPr marL="0" indent="0">
               <a:buNone/>
             </a:pPr>
             <a:r>
@@ -4871,6 +4904,13 @@
           </a:solidFill>
           <a:ln/>
         </p:spPr>
+        <p:txBody>
+          <a:bodyPr/>
+          <a:lstStyle/>
+          <a:p>
+            <a:endParaRPr lang="es-CL"/>
+          </a:p>
+        </p:txBody>
       </p:sp>
       <p:sp>
         <p:nvSpPr>
@@ -4893,7 +4933,7 @@
           <a:bodyPr wrap="square" rtlCol="0" anchor="ctr"/>
           <a:lstStyle/>
           <a:p>
-            <a:pPr indent="0" marL="0">
+            <a:pPr marL="0" indent="0">
               <a:buNone/>
             </a:pPr>
             <a:r>
@@ -4932,7 +4972,7 @@
           <a:bodyPr wrap="square" rtlCol="0" anchor="ctr"/>
           <a:lstStyle/>
           <a:p>
-            <a:pPr indent="0" marL="0">
+            <a:pPr marL="0" indent="0">
               <a:buNone/>
             </a:pPr>
             <a:r>
@@ -4969,6 +5009,13 @@
           </a:solidFill>
           <a:ln/>
         </p:spPr>
+        <p:txBody>
+          <a:bodyPr/>
+          <a:lstStyle/>
+          <a:p>
+            <a:endParaRPr lang="es-CL"/>
+          </a:p>
+        </p:txBody>
       </p:sp>
       <p:sp>
         <p:nvSpPr>
@@ -4991,7 +5038,7 @@
           <a:bodyPr wrap="square" rtlCol="0" anchor="ctr"/>
           <a:lstStyle/>
           <a:p>
-            <a:pPr indent="0" marL="0">
+            <a:pPr marL="0" indent="0">
               <a:buNone/>
             </a:pPr>
             <a:r>
@@ -5030,7 +5077,7 @@
           <a:bodyPr wrap="square" rtlCol="0" anchor="ctr"/>
           <a:lstStyle/>
           <a:p>
-            <a:pPr indent="0" marL="0">
+            <a:pPr marL="0" indent="0">
               <a:buNone/>
             </a:pPr>
             <a:r>
@@ -5064,6 +5111,7 @@
         <a:solidFill>
           <a:srgbClr val="FFFFFF"/>
         </a:solidFill>
+        <a:effectLst/>
       </p:bgPr>
     </p:bg>
     <p:spTree>
@@ -5101,7 +5149,7 @@
           <a:bodyPr wrap="square" rtlCol="0" anchor="ctr"/>
           <a:lstStyle/>
           <a:p>
-            <a:pPr indent="0" marL="0">
+            <a:pPr marL="0" indent="0">
               <a:buNone/>
             </a:pPr>
             <a:r>
@@ -5140,7 +5188,7 @@
           <a:bodyPr wrap="square" rtlCol="0" anchor="ctr"/>
           <a:lstStyle/>
           <a:p>
-            <a:pPr indent="0" marL="0">
+            <a:pPr marL="0" indent="0">
               <a:buNone/>
             </a:pPr>
             <a:r>
@@ -5160,7 +5208,7 @@
       </p:sp>
       <p:graphicFrame>
         <p:nvGraphicFramePr>
-          <p:cNvPr id="4" name="Chart 0" descr=""/>
+          <p:cNvPr id="4" name="Chart 0"/>
           <p:cNvGraphicFramePr/>
           <p:nvPr/>
         </p:nvGraphicFramePr>
@@ -5168,9 +5216,9 @@
           <a:off x="548640" y="1828800"/>
           <a:ext cx="5577840" cy="4480560"/>
         </p:xfrm>
-        <a:graphic xmlns:a="http://schemas.openxmlformats.org/drawingml/2006/main">
+        <a:graphic>
           <a:graphicData uri="http://schemas.openxmlformats.org/drawingml/2006/chart">
-            <c:chart xmlns:c="http://schemas.openxmlformats.org/drawingml/2006/chart" r:id="rId1"/>
+            <c:chart xmlns:c="http://schemas.openxmlformats.org/drawingml/2006/chart" xmlns:r="http://schemas.openxmlformats.org/officeDocument/2006/relationships" r:id="rId3"/>
           </a:graphicData>
         </a:graphic>
       </p:graphicFrame>
@@ -5190,17 +5238,41 @@
         </p:nvGraphicFramePr>
         <p:xfrm>
           <a:off x="6400800" y="2194560"/>
-          <a:ext cx="5212080" cy="914400"/>
+          <a:ext cx="5212080" cy="2286000"/>
         </p:xfrm>
         <a:graphic>
           <a:graphicData uri="http://schemas.openxmlformats.org/drawingml/2006/table">
             <a:tbl>
               <a:tblPr/>
               <a:tblGrid>
-                <a:gridCol w="2468880"/>
-                <a:gridCol w="914400"/>
-                <a:gridCol w="914400"/>
-                <a:gridCol w="914400"/>
+                <a:gridCol w="2468880">
+                  <a:extLst>
+                    <a:ext uri="{9D8B030D-6E8A-4147-A177-3AD203B41FA5}">
+                      <a16:colId xmlns:a16="http://schemas.microsoft.com/office/drawing/2014/main" val="20000"/>
+                    </a:ext>
+                  </a:extLst>
+                </a:gridCol>
+                <a:gridCol w="914400">
+                  <a:extLst>
+                    <a:ext uri="{9D8B030D-6E8A-4147-A177-3AD203B41FA5}">
+                      <a16:colId xmlns:a16="http://schemas.microsoft.com/office/drawing/2014/main" val="20001"/>
+                    </a:ext>
+                  </a:extLst>
+                </a:gridCol>
+                <a:gridCol w="914400">
+                  <a:extLst>
+                    <a:ext uri="{9D8B030D-6E8A-4147-A177-3AD203B41FA5}">
+                      <a16:colId xmlns:a16="http://schemas.microsoft.com/office/drawing/2014/main" val="20002"/>
+                    </a:ext>
+                  </a:extLst>
+                </a:gridCol>
+                <a:gridCol w="914400">
+                  <a:extLst>
+                    <a:ext uri="{9D8B030D-6E8A-4147-A177-3AD203B41FA5}">
+                      <a16:colId xmlns:a16="http://schemas.microsoft.com/office/drawing/2014/main" val="20003"/>
+                    </a:ext>
+                  </a:extLst>
+                </a:gridCol>
               </a:tblGrid>
               <a:tr h="457200">
                 <a:tc>
@@ -5208,7 +5280,7 @@
                     <a:bodyPr/>
                     <a:lstStyle/>
                     <a:p>
-                      <a:pPr algn="ctr" indent="0" marL="0">
+                      <a:pPr marL="0" indent="0" algn="ctr">
                         <a:buNone/>
                       </a:pPr>
                       <a:r>
@@ -5229,7 +5301,7 @@
                       </a:endParaRPr>
                     </a:p>
                   </a:txBody>
-                  <a:tcPr marL="91440" marR="91440" marT="45720" marB="45720" anchor="ctr">
+                  <a:tcPr anchor="ctr">
                     <a:lnL w="12700" cap="flat" cmpd="sng" algn="ctr">
                       <a:solidFill>
                         <a:srgbClr val="E3E8E0"/>
@@ -5276,7 +5348,7 @@
                     <a:bodyPr/>
                     <a:lstStyle/>
                     <a:p>
-                      <a:pPr algn="ctr" indent="0" marL="0">
+                      <a:pPr marL="0" indent="0" algn="ctr">
                         <a:buNone/>
                       </a:pPr>
                       <a:r>
@@ -5297,7 +5369,7 @@
                       </a:endParaRPr>
                     </a:p>
                   </a:txBody>
-                  <a:tcPr marL="91440" marR="91440" marT="45720" marB="45720" anchor="ctr">
+                  <a:tcPr anchor="ctr">
                     <a:lnL w="12700" cap="flat" cmpd="sng" algn="ctr">
                       <a:solidFill>
                         <a:srgbClr val="E3E8E0"/>
@@ -5344,7 +5416,7 @@
                     <a:bodyPr/>
                     <a:lstStyle/>
                     <a:p>
-                      <a:pPr algn="ctr" indent="0" marL="0">
+                      <a:pPr marL="0" indent="0" algn="ctr">
                         <a:buNone/>
                       </a:pPr>
                       <a:r>
@@ -5365,7 +5437,7 @@
                       </a:endParaRPr>
                     </a:p>
                   </a:txBody>
-                  <a:tcPr marL="91440" marR="91440" marT="45720" marB="45720" anchor="ctr">
+                  <a:tcPr anchor="ctr">
                     <a:lnL w="12700" cap="flat" cmpd="sng" algn="ctr">
                       <a:solidFill>
                         <a:srgbClr val="E3E8E0"/>
@@ -5412,7 +5484,7 @@
                     <a:bodyPr/>
                     <a:lstStyle/>
                     <a:p>
-                      <a:pPr algn="ctr" indent="0" marL="0">
+                      <a:pPr marL="0" indent="0" algn="ctr">
                         <a:buNone/>
                       </a:pPr>
                       <a:r>
@@ -5433,7 +5505,7 @@
                       </a:endParaRPr>
                     </a:p>
                   </a:txBody>
-                  <a:tcPr marL="91440" marR="91440" marT="45720" marB="45720" anchor="ctr">
+                  <a:tcPr anchor="ctr">
                     <a:lnL w="12700" cap="flat" cmpd="sng" algn="ctr">
                       <a:solidFill>
                         <a:srgbClr val="E3E8E0"/>
@@ -5475,6 +5547,11 @@
                     </a:solidFill>
                   </a:tcPr>
                 </a:tc>
+                <a:extLst>
+                  <a:ext uri="{0D108BD9-81ED-4DB2-BD59-A6C34878D82A}">
+                    <a16:rowId xmlns:a16="http://schemas.microsoft.com/office/drawing/2014/main" val="10000"/>
+                  </a:ext>
+                </a:extLst>
               </a:tr>
               <a:tr h="457200">
                 <a:tc>
@@ -5482,7 +5559,7 @@
                     <a:bodyPr/>
                     <a:lstStyle/>
                     <a:p>
-                      <a:pPr algn="l" indent="0" marL="0">
+                      <a:pPr marL="0" indent="0" algn="l">
                         <a:buNone/>
                       </a:pPr>
                       <a:r>
@@ -5503,7 +5580,7 @@
                       </a:endParaRPr>
                     </a:p>
                   </a:txBody>
-                  <a:tcPr marL="91440" marR="91440" marT="45720" marB="45720" anchor="ctr">
+                  <a:tcPr anchor="ctr">
                     <a:lnL w="12700" cap="flat" cmpd="sng" algn="ctr">
                       <a:solidFill>
                         <a:srgbClr val="E3E8E0"/>
@@ -5550,7 +5627,7 @@
                     <a:bodyPr/>
                     <a:lstStyle/>
                     <a:p>
-                      <a:pPr algn="l" indent="0" marL="0">
+                      <a:pPr marL="0" indent="0" algn="l">
                         <a:buNone/>
                       </a:pPr>
                       <a:r>
@@ -5571,7 +5648,7 @@
                       </a:endParaRPr>
                     </a:p>
                   </a:txBody>
-                  <a:tcPr marL="91440" marR="91440" marT="45720" marB="45720" anchor="ctr">
+                  <a:tcPr anchor="ctr">
                     <a:lnL w="12700" cap="flat" cmpd="sng" algn="ctr">
                       <a:solidFill>
                         <a:srgbClr val="E3E8E0"/>
@@ -5618,7 +5695,7 @@
                     <a:bodyPr/>
                     <a:lstStyle/>
                     <a:p>
-                      <a:pPr algn="l" indent="0" marL="0">
+                      <a:pPr marL="0" indent="0" algn="l">
                         <a:buNone/>
                       </a:pPr>
                       <a:r>
@@ -5639,7 +5716,7 @@
                       </a:endParaRPr>
                     </a:p>
                   </a:txBody>
-                  <a:tcPr marL="91440" marR="91440" marT="45720" marB="45720" anchor="ctr">
+                  <a:tcPr anchor="ctr">
                     <a:lnL w="12700" cap="flat" cmpd="sng" algn="ctr">
                       <a:solidFill>
                         <a:srgbClr val="E3E8E0"/>
@@ -5686,7 +5763,7 @@
                     <a:bodyPr/>
                     <a:lstStyle/>
                     <a:p>
-                      <a:pPr algn="l" indent="0" marL="0">
+                      <a:pPr marL="0" indent="0" algn="l">
                         <a:buNone/>
                       </a:pPr>
                       <a:r>
@@ -5707,7 +5784,7 @@
                       </a:endParaRPr>
                     </a:p>
                   </a:txBody>
-                  <a:tcPr marL="91440" marR="91440" marT="45720" marB="45720" anchor="ctr">
+                  <a:tcPr anchor="ctr">
                     <a:lnL w="12700" cap="flat" cmpd="sng" algn="ctr">
                       <a:solidFill>
                         <a:srgbClr val="E3E8E0"/>
@@ -5749,6 +5826,11 @@
                     </a:solidFill>
                   </a:tcPr>
                 </a:tc>
+                <a:extLst>
+                  <a:ext uri="{0D108BD9-81ED-4DB2-BD59-A6C34878D82A}">
+                    <a16:rowId xmlns:a16="http://schemas.microsoft.com/office/drawing/2014/main" val="10001"/>
+                  </a:ext>
+                </a:extLst>
               </a:tr>
               <a:tr h="457200">
                 <a:tc>
@@ -5756,7 +5838,7 @@
                     <a:bodyPr/>
                     <a:lstStyle/>
                     <a:p>
-                      <a:pPr algn="l" indent="0" marL="0">
+                      <a:pPr marL="0" indent="0" algn="l">
                         <a:buNone/>
                       </a:pPr>
                       <a:r>
@@ -5777,7 +5859,7 @@
                       </a:endParaRPr>
                     </a:p>
                   </a:txBody>
-                  <a:tcPr marL="91440" marR="91440" marT="45720" marB="45720" anchor="ctr">
+                  <a:tcPr anchor="ctr">
                     <a:lnL w="12700" cap="flat" cmpd="sng" algn="ctr">
                       <a:solidFill>
                         <a:srgbClr val="E3E8E0"/>
@@ -5824,7 +5906,7 @@
                     <a:bodyPr/>
                     <a:lstStyle/>
                     <a:p>
-                      <a:pPr algn="l" indent="0" marL="0">
+                      <a:pPr marL="0" indent="0" algn="l">
                         <a:buNone/>
                       </a:pPr>
                       <a:r>
@@ -5845,7 +5927,7 @@
                       </a:endParaRPr>
                     </a:p>
                   </a:txBody>
-                  <a:tcPr marL="91440" marR="91440" marT="45720" marB="45720" anchor="ctr">
+                  <a:tcPr anchor="ctr">
                     <a:lnL w="12700" cap="flat" cmpd="sng" algn="ctr">
                       <a:solidFill>
                         <a:srgbClr val="E3E8E0"/>
@@ -5892,7 +5974,7 @@
                     <a:bodyPr/>
                     <a:lstStyle/>
                     <a:p>
-                      <a:pPr algn="l" indent="0" marL="0">
+                      <a:pPr marL="0" indent="0" algn="l">
                         <a:buNone/>
                       </a:pPr>
                       <a:r>
@@ -5913,7 +5995,7 @@
                       </a:endParaRPr>
                     </a:p>
                   </a:txBody>
-                  <a:tcPr marL="91440" marR="91440" marT="45720" marB="45720" anchor="ctr">
+                  <a:tcPr anchor="ctr">
                     <a:lnL w="12700" cap="flat" cmpd="sng" algn="ctr">
                       <a:solidFill>
                         <a:srgbClr val="E3E8E0"/>
@@ -5960,7 +6042,7 @@
                     <a:bodyPr/>
                     <a:lstStyle/>
                     <a:p>
-                      <a:pPr algn="l" indent="0" marL="0">
+                      <a:pPr marL="0" indent="0" algn="l">
                         <a:buNone/>
                       </a:pPr>
                       <a:r>
@@ -5981,7 +6063,7 @@
                       </a:endParaRPr>
                     </a:p>
                   </a:txBody>
-                  <a:tcPr marL="91440" marR="91440" marT="45720" marB="45720" anchor="ctr">
+                  <a:tcPr anchor="ctr">
                     <a:lnL w="12700" cap="flat" cmpd="sng" algn="ctr">
                       <a:solidFill>
                         <a:srgbClr val="E3E8E0"/>
@@ -6023,6 +6105,11 @@
                     </a:solidFill>
                   </a:tcPr>
                 </a:tc>
+                <a:extLst>
+                  <a:ext uri="{0D108BD9-81ED-4DB2-BD59-A6C34878D82A}">
+                    <a16:rowId xmlns:a16="http://schemas.microsoft.com/office/drawing/2014/main" val="10002"/>
+                  </a:ext>
+                </a:extLst>
               </a:tr>
               <a:tr h="457200">
                 <a:tc>
@@ -6030,7 +6117,7 @@
                     <a:bodyPr/>
                     <a:lstStyle/>
                     <a:p>
-                      <a:pPr algn="l" indent="0" marL="0">
+                      <a:pPr marL="0" indent="0" algn="l">
                         <a:buNone/>
                       </a:pPr>
                       <a:r>
@@ -6051,7 +6138,7 @@
                       </a:endParaRPr>
                     </a:p>
                   </a:txBody>
-                  <a:tcPr marL="91440" marR="91440" marT="45720" marB="45720" anchor="ctr">
+                  <a:tcPr anchor="ctr">
                     <a:lnL w="12700" cap="flat" cmpd="sng" algn="ctr">
                       <a:solidFill>
                         <a:srgbClr val="E3E8E0"/>
@@ -6098,7 +6185,7 @@
                     <a:bodyPr/>
                     <a:lstStyle/>
                     <a:p>
-                      <a:pPr algn="l" indent="0" marL="0">
+                      <a:pPr marL="0" indent="0" algn="l">
                         <a:buNone/>
                       </a:pPr>
                       <a:r>
@@ -6119,7 +6206,7 @@
                       </a:endParaRPr>
                     </a:p>
                   </a:txBody>
-                  <a:tcPr marL="91440" marR="91440" marT="45720" marB="45720" anchor="ctr">
+                  <a:tcPr anchor="ctr">
                     <a:lnL w="12700" cap="flat" cmpd="sng" algn="ctr">
                       <a:solidFill>
                         <a:srgbClr val="E3E8E0"/>
@@ -6166,7 +6253,7 @@
                     <a:bodyPr/>
                     <a:lstStyle/>
                     <a:p>
-                      <a:pPr algn="l" indent="0" marL="0">
+                      <a:pPr marL="0" indent="0" algn="l">
                         <a:buNone/>
                       </a:pPr>
                       <a:r>
@@ -6187,7 +6274,7 @@
                       </a:endParaRPr>
                     </a:p>
                   </a:txBody>
-                  <a:tcPr marL="91440" marR="91440" marT="45720" marB="45720" anchor="ctr">
+                  <a:tcPr anchor="ctr">
                     <a:lnL w="12700" cap="flat" cmpd="sng" algn="ctr">
                       <a:solidFill>
                         <a:srgbClr val="E3E8E0"/>
@@ -6234,7 +6321,7 @@
                     <a:bodyPr/>
                     <a:lstStyle/>
                     <a:p>
-                      <a:pPr algn="l" indent="0" marL="0">
+                      <a:pPr marL="0" indent="0" algn="l">
                         <a:buNone/>
                       </a:pPr>
                       <a:r>
@@ -6255,7 +6342,7 @@
                       </a:endParaRPr>
                     </a:p>
                   </a:txBody>
-                  <a:tcPr marL="91440" marR="91440" marT="45720" marB="45720" anchor="ctr">
+                  <a:tcPr anchor="ctr">
                     <a:lnL w="12700" cap="flat" cmpd="sng" algn="ctr">
                       <a:solidFill>
                         <a:srgbClr val="E3E8E0"/>
@@ -6297,6 +6384,11 @@
                     </a:solidFill>
                   </a:tcPr>
                 </a:tc>
+                <a:extLst>
+                  <a:ext uri="{0D108BD9-81ED-4DB2-BD59-A6C34878D82A}">
+                    <a16:rowId xmlns:a16="http://schemas.microsoft.com/office/drawing/2014/main" val="10003"/>
+                  </a:ext>
+                </a:extLst>
               </a:tr>
               <a:tr h="457200">
                 <a:tc>
@@ -6304,7 +6396,7 @@
                     <a:bodyPr/>
                     <a:lstStyle/>
                     <a:p>
-                      <a:pPr algn="l" indent="0" marL="0">
+                      <a:pPr marL="0" indent="0" algn="l">
                         <a:buNone/>
                       </a:pPr>
                       <a:r>
@@ -6325,7 +6417,7 @@
                       </a:endParaRPr>
                     </a:p>
                   </a:txBody>
-                  <a:tcPr marL="91440" marR="91440" marT="45720" marB="45720" anchor="ctr">
+                  <a:tcPr anchor="ctr">
                     <a:lnL w="12700" cap="flat" cmpd="sng" algn="ctr">
                       <a:solidFill>
                         <a:srgbClr val="E3E8E0"/>
@@ -6372,7 +6464,7 @@
                     <a:bodyPr/>
                     <a:lstStyle/>
                     <a:p>
-                      <a:pPr algn="l" indent="0" marL="0">
+                      <a:pPr marL="0" indent="0" algn="l">
                         <a:buNone/>
                       </a:pPr>
                       <a:r>
@@ -6393,7 +6485,7 @@
                       </a:endParaRPr>
                     </a:p>
                   </a:txBody>
-                  <a:tcPr marL="91440" marR="91440" marT="45720" marB="45720" anchor="ctr">
+                  <a:tcPr anchor="ctr">
                     <a:lnL w="12700" cap="flat" cmpd="sng" algn="ctr">
                       <a:solidFill>
                         <a:srgbClr val="E3E8E0"/>
@@ -6440,7 +6532,7 @@
                     <a:bodyPr/>
                     <a:lstStyle/>
                     <a:p>
-                      <a:pPr algn="l" indent="0" marL="0">
+                      <a:pPr marL="0" indent="0" algn="l">
                         <a:buNone/>
                       </a:pPr>
                       <a:r>
@@ -6461,7 +6553,7 @@
                       </a:endParaRPr>
                     </a:p>
                   </a:txBody>
-                  <a:tcPr marL="91440" marR="91440" marT="45720" marB="45720" anchor="ctr">
+                  <a:tcPr anchor="ctr">
                     <a:lnL w="12700" cap="flat" cmpd="sng" algn="ctr">
                       <a:solidFill>
                         <a:srgbClr val="E3E8E0"/>
@@ -6508,7 +6600,7 @@
                     <a:bodyPr/>
                     <a:lstStyle/>
                     <a:p>
-                      <a:pPr algn="l" indent="0" marL="0">
+                      <a:pPr marL="0" indent="0" algn="l">
                         <a:buNone/>
                       </a:pPr>
                       <a:r>
@@ -6529,7 +6621,7 @@
                       </a:endParaRPr>
                     </a:p>
                   </a:txBody>
-                  <a:tcPr marL="91440" marR="91440" marT="45720" marB="45720" anchor="ctr">
+                  <a:tcPr anchor="ctr">
                     <a:lnL w="12700" cap="flat" cmpd="sng" algn="ctr">
                       <a:solidFill>
                         <a:srgbClr val="E3E8E0"/>
@@ -6571,6 +6663,11 @@
                     </a:solidFill>
                   </a:tcPr>
                 </a:tc>
+                <a:extLst>
+                  <a:ext uri="{0D108BD9-81ED-4DB2-BD59-A6C34878D82A}">
+                    <a16:rowId xmlns:a16="http://schemas.microsoft.com/office/drawing/2014/main" val="10004"/>
+                  </a:ext>
+                </a:extLst>
               </a:tr>
             </a:tbl>
           </a:graphicData>
@@ -6578,7 +6675,7 @@
       </p:graphicFrame>
       <p:sp>
         <p:nvSpPr>
-          <p:cNvPr id="6" name="Text 2"/>
+          <p:cNvPr id="5" name="Text 2"/>
           <p:cNvSpPr/>
           <p:nvPr/>
         </p:nvSpPr>
@@ -6597,7 +6694,7 @@
           <a:bodyPr wrap="square" rtlCol="0" anchor="ctr"/>
           <a:lstStyle/>
           <a:p>
-            <a:pPr indent="0" marL="0">
+            <a:pPr marL="0" indent="0">
               <a:buNone/>
             </a:pPr>
             <a:r>
@@ -6631,6 +6728,7 @@
         <a:solidFill>
           <a:srgbClr val="FFFFFF"/>
         </a:solidFill>
+        <a:effectLst/>
       </p:bgPr>
     </p:bg>
     <p:spTree>
@@ -6668,7 +6766,7 @@
           <a:bodyPr wrap="square" rtlCol="0" anchor="ctr"/>
           <a:lstStyle/>
           <a:p>
-            <a:pPr indent="0" marL="0">
+            <a:pPr marL="0" indent="0">
               <a:buNone/>
             </a:pPr>
             <a:r>
@@ -6688,7 +6786,7 @@
       </p:sp>
       <p:graphicFrame>
         <p:nvGraphicFramePr>
-          <p:cNvPr id="3" name="Chart 0" descr=""/>
+          <p:cNvPr id="3" name="Chart 0"/>
           <p:cNvGraphicFramePr/>
           <p:nvPr/>
         </p:nvGraphicFramePr>
@@ -6696,9 +6794,9 @@
           <a:off x="548640" y="1463040"/>
           <a:ext cx="6583680" cy="4754880"/>
         </p:xfrm>
-        <a:graphic xmlns:a="http://schemas.openxmlformats.org/drawingml/2006/main">
+        <a:graphic>
           <a:graphicData uri="http://schemas.openxmlformats.org/drawingml/2006/chart">
-            <c:chart xmlns:c="http://schemas.openxmlformats.org/drawingml/2006/chart" r:id="rId1"/>
+            <c:chart xmlns:c="http://schemas.openxmlformats.org/drawingml/2006/chart" xmlns:r="http://schemas.openxmlformats.org/officeDocument/2006/relationships" r:id="rId3"/>
           </a:graphicData>
         </a:graphic>
       </p:graphicFrame>
@@ -6728,13 +6826,20 @@
             <a:prstDash val="solid"/>
           </a:ln>
           <a:effectLst>
-            <a:outerShdw sx="100000" sy="100000" kx="0" ky="0" algn="bl" rotWithShape="0" blurRad="76200" dist="25400" dir="5400000">
+            <a:outerShdw blurRad="76200" dist="25400" dir="5400000" algn="bl" rotWithShape="0">
               <a:srgbClr val="9AA69A">
                 <a:alpha val="35000"/>
               </a:srgbClr>
             </a:outerShdw>
           </a:effectLst>
         </p:spPr>
+        <p:txBody>
+          <a:bodyPr/>
+          <a:lstStyle/>
+          <a:p>
+            <a:endParaRPr lang="es-CL"/>
+          </a:p>
+        </p:txBody>
       </p:sp>
       <p:sp>
         <p:nvSpPr>
@@ -6757,7 +6862,7 @@
           <a:bodyPr wrap="square" rtlCol="0" anchor="ctr"/>
           <a:lstStyle/>
           <a:p>
-            <a:pPr indent="0" marL="0">
+            <a:pPr marL="0" indent="0">
               <a:buNone/>
             </a:pPr>
             <a:r>
@@ -6885,6 +6990,7 @@
         <a:solidFill>
           <a:srgbClr val="1C3A1C"/>
         </a:solidFill>
+        <a:effectLst/>
       </p:bgPr>
     </p:bg>
     <p:spTree>
@@ -6922,7 +7028,7 @@
           <a:bodyPr wrap="square" rtlCol="0" anchor="ctr"/>
           <a:lstStyle/>
           <a:p>
-            <a:pPr indent="0" marL="0">
+            <a:pPr marL="0" indent="0">
               <a:buNone/>
             </a:pPr>
             <a:r>
@@ -6961,7 +7067,7 @@
           <a:bodyPr wrap="square" rtlCol="0" anchor="ctr"/>
           <a:lstStyle/>
           <a:p>
-            <a:pPr indent="0" marL="0">
+            <a:pPr marL="0" indent="0">
               <a:buNone/>
             </a:pPr>
             <a:r>
@@ -7005,6 +7111,13 @@
             <a:prstDash val="solid"/>
           </a:ln>
         </p:spPr>
+        <p:txBody>
+          <a:bodyPr/>
+          <a:lstStyle/>
+          <a:p>
+            <a:endParaRPr lang="es-CL"/>
+          </a:p>
+        </p:txBody>
       </p:sp>
       <p:sp>
         <p:nvSpPr>
@@ -7027,7 +7140,7 @@
           <a:bodyPr wrap="square" rtlCol="0" anchor="ctr"/>
           <a:lstStyle/>
           <a:p>
-            <a:pPr algn="ctr" indent="0" marL="0">
+            <a:pPr marL="0" indent="0" algn="ctr">
               <a:buNone/>
             </a:pPr>
             <a:r>
@@ -7066,7 +7179,7 @@
           <a:bodyPr wrap="square" rtlCol="0" anchor="ctr"/>
           <a:lstStyle/>
           <a:p>
-            <a:pPr indent="0" marL="0">
+            <a:pPr marL="0" indent="0">
               <a:buNone/>
             </a:pPr>
             <a:r>
@@ -7105,7 +7218,7 @@
           <a:bodyPr wrap="square" rtlCol="0" anchor="ctr"/>
           <a:lstStyle/>
           <a:p>
-            <a:pPr indent="0" marL="0">
+            <a:pPr marL="0" indent="0">
               <a:buNone/>
             </a:pPr>
             <a:r>
@@ -7149,6 +7262,13 @@
             <a:prstDash val="solid"/>
           </a:ln>
         </p:spPr>
+        <p:txBody>
+          <a:bodyPr/>
+          <a:lstStyle/>
+          <a:p>
+            <a:endParaRPr lang="es-CL"/>
+          </a:p>
+        </p:txBody>
       </p:sp>
       <p:sp>
         <p:nvSpPr>
@@ -7171,7 +7291,7 @@
           <a:bodyPr wrap="square" rtlCol="0" anchor="ctr"/>
           <a:lstStyle/>
           <a:p>
-            <a:pPr algn="ctr" indent="0" marL="0">
+            <a:pPr marL="0" indent="0" algn="ctr">
               <a:buNone/>
             </a:pPr>
             <a:r>
@@ -7210,7 +7330,7 @@
           <a:bodyPr wrap="square" rtlCol="0" anchor="ctr"/>
           <a:lstStyle/>
           <a:p>
-            <a:pPr indent="0" marL="0">
+            <a:pPr marL="0" indent="0">
               <a:buNone/>
             </a:pPr>
             <a:r>
@@ -7249,7 +7369,7 @@
           <a:bodyPr wrap="square" rtlCol="0" anchor="ctr"/>
           <a:lstStyle/>
           <a:p>
-            <a:pPr indent="0" marL="0">
+            <a:pPr marL="0" indent="0">
               <a:buNone/>
             </a:pPr>
             <a:r>
@@ -7293,6 +7413,13 @@
             <a:prstDash val="solid"/>
           </a:ln>
         </p:spPr>
+        <p:txBody>
+          <a:bodyPr/>
+          <a:lstStyle/>
+          <a:p>
+            <a:endParaRPr lang="es-CL"/>
+          </a:p>
+        </p:txBody>
       </p:sp>
       <p:sp>
         <p:nvSpPr>
@@ -7315,7 +7442,7 @@
           <a:bodyPr wrap="square" rtlCol="0" anchor="ctr"/>
           <a:lstStyle/>
           <a:p>
-            <a:pPr algn="ctr" indent="0" marL="0">
+            <a:pPr marL="0" indent="0" algn="ctr">
               <a:buNone/>
             </a:pPr>
             <a:r>
@@ -7354,7 +7481,7 @@
           <a:bodyPr wrap="square" rtlCol="0" anchor="ctr"/>
           <a:lstStyle/>
           <a:p>
-            <a:pPr indent="0" marL="0">
+            <a:pPr marL="0" indent="0">
               <a:buNone/>
             </a:pPr>
             <a:r>
@@ -7393,7 +7520,7 @@
           <a:bodyPr wrap="square" rtlCol="0" anchor="ctr"/>
           <a:lstStyle/>
           <a:p>
-            <a:pPr indent="0" marL="0">
+            <a:pPr marL="0" indent="0">
               <a:buNone/>
             </a:pPr>
             <a:r>
@@ -7437,6 +7564,13 @@
             <a:prstDash val="solid"/>
           </a:ln>
         </p:spPr>
+        <p:txBody>
+          <a:bodyPr/>
+          <a:lstStyle/>
+          <a:p>
+            <a:endParaRPr lang="es-CL"/>
+          </a:p>
+        </p:txBody>
       </p:sp>
       <p:sp>
         <p:nvSpPr>
@@ -7459,7 +7593,7 @@
           <a:bodyPr wrap="square" rtlCol="0" anchor="ctr"/>
           <a:lstStyle/>
           <a:p>
-            <a:pPr algn="ctr" indent="0" marL="0">
+            <a:pPr marL="0" indent="0" algn="ctr">
               <a:buNone/>
             </a:pPr>
             <a:r>
@@ -7498,7 +7632,7 @@
           <a:bodyPr wrap="square" rtlCol="0" anchor="ctr"/>
           <a:lstStyle/>
           <a:p>
-            <a:pPr indent="0" marL="0">
+            <a:pPr marL="0" indent="0">
               <a:buNone/>
             </a:pPr>
             <a:r>
@@ -7537,7 +7671,7 @@
           <a:bodyPr wrap="square" rtlCol="0" anchor="ctr"/>
           <a:lstStyle/>
           <a:p>
-            <a:pPr indent="0" marL="0">
+            <a:pPr marL="0" indent="0">
               <a:buNone/>
             </a:pPr>
             <a:r>
@@ -7571,6 +7705,7 @@
         <a:solidFill>
           <a:srgbClr val="FFFFFF"/>
         </a:solidFill>
+        <a:effectLst/>
       </p:bgPr>
     </p:bg>
     <p:spTree>
@@ -7608,7 +7743,7 @@
           <a:bodyPr wrap="square" rtlCol="0" anchor="ctr"/>
           <a:lstStyle/>
           <a:p>
-            <a:pPr indent="0" marL="0">
+            <a:pPr marL="0" indent="0">
               <a:buNone/>
             </a:pPr>
             <a:r>
@@ -7652,13 +7787,20 @@
             <a:prstDash val="solid"/>
           </a:ln>
           <a:effectLst>
-            <a:outerShdw sx="100000" sy="100000" kx="0" ky="0" algn="bl" rotWithShape="0" blurRad="76200" dist="25400" dir="5400000">
+            <a:outerShdw blurRad="76200" dist="25400" dir="5400000" algn="bl" rotWithShape="0">
               <a:srgbClr val="9AA69A">
                 <a:alpha val="35000"/>
               </a:srgbClr>
             </a:outerShdw>
           </a:effectLst>
         </p:spPr>
+        <p:txBody>
+          <a:bodyPr/>
+          <a:lstStyle/>
+          <a:p>
+            <a:endParaRPr lang="es-CL"/>
+          </a:p>
+        </p:txBody>
       </p:sp>
       <p:sp>
         <p:nvSpPr>
@@ -7681,7 +7823,7 @@
           <a:bodyPr wrap="square" rtlCol="0" anchor="ctr"/>
           <a:lstStyle/>
           <a:p>
-            <a:pPr indent="0" marL="0">
+            <a:pPr marL="0" indent="0">
               <a:buNone/>
             </a:pPr>
             <a:r>
@@ -7843,13 +7985,20 @@
             <a:prstDash val="solid"/>
           </a:ln>
           <a:effectLst>
-            <a:outerShdw sx="100000" sy="100000" kx="0" ky="0" algn="bl" rotWithShape="0" blurRad="76200" dist="25400" dir="5400000">
+            <a:outerShdw blurRad="76200" dist="25400" dir="5400000" algn="bl" rotWithShape="0">
               <a:srgbClr val="9AA69A">
                 <a:alpha val="35000"/>
               </a:srgbClr>
             </a:outerShdw>
           </a:effectLst>
         </p:spPr>
+        <p:txBody>
+          <a:bodyPr/>
+          <a:lstStyle/>
+          <a:p>
+            <a:endParaRPr lang="es-CL"/>
+          </a:p>
+        </p:txBody>
       </p:sp>
       <p:sp>
         <p:nvSpPr>
@@ -7872,7 +8021,7 @@
           <a:bodyPr wrap="square" rtlCol="0" anchor="ctr"/>
           <a:lstStyle/>
           <a:p>
-            <a:pPr indent="0" marL="0">
+            <a:pPr marL="0" indent="0">
               <a:buNone/>
             </a:pPr>
             <a:r>
@@ -8024,6 +8173,7 @@
         <a:solidFill>
           <a:srgbClr val="1C3A1C"/>
         </a:solidFill>
+        <a:effectLst/>
       </p:bgPr>
     </p:bg>
     <p:spTree>
@@ -8061,7 +8211,7 @@
           <a:bodyPr wrap="square" rtlCol="0" anchor="ctr"/>
           <a:lstStyle/>
           <a:p>
-            <a:pPr algn="ctr" indent="0" marL="0">
+            <a:pPr marL="0" indent="0" algn="ctr">
               <a:buNone/>
             </a:pPr>
             <a:r>
@@ -8100,7 +8250,7 @@
           <a:bodyPr wrap="square" rtlCol="0" anchor="ctr"/>
           <a:lstStyle/>
           <a:p>
-            <a:pPr algn="ctr" indent="0" marL="0">
+            <a:pPr marL="0" indent="0" algn="ctr">
               <a:buNone/>
             </a:pPr>
             <a:r>
@@ -8139,7 +8289,7 @@
           <a:bodyPr wrap="square" rtlCol="0" anchor="ctr"/>
           <a:lstStyle/>
           <a:p>
-            <a:pPr algn="ctr" indent="0" marL="0">
+            <a:pPr marL="0" indent="0" algn="ctr">
               <a:buNone/>
             </a:pPr>
             <a:r>
@@ -8458,4 +8608,319 @@
     </a:ext>
   </a:extLst>
 </a:theme>
+</file>
+
+<file path=ppt/theme/theme2.xml><?xml version="1.0" encoding="utf-8"?>
+<a:theme xmlns:a="http://schemas.openxmlformats.org/drawingml/2006/main" name="Tema de Office">
+  <a:themeElements>
+    <a:clrScheme name="Office">
+      <a:dk1>
+        <a:sysClr val="windowText" lastClr="000000"/>
+      </a:dk1>
+      <a:lt1>
+        <a:sysClr val="window" lastClr="FFFFFF"/>
+      </a:lt1>
+      <a:dk2>
+        <a:srgbClr val="0E2841"/>
+      </a:dk2>
+      <a:lt2>
+        <a:srgbClr val="E8E8E8"/>
+      </a:lt2>
+      <a:accent1>
+        <a:srgbClr val="156082"/>
+      </a:accent1>
+      <a:accent2>
+        <a:srgbClr val="E97132"/>
+      </a:accent2>
+      <a:accent3>
+        <a:srgbClr val="196B24"/>
+      </a:accent3>
+      <a:accent4>
+        <a:srgbClr val="0F9ED5"/>
+      </a:accent4>
+      <a:accent5>
+        <a:srgbClr val="A02B93"/>
+      </a:accent5>
+      <a:accent6>
+        <a:srgbClr val="4EA72E"/>
+      </a:accent6>
+      <a:hlink>
+        <a:srgbClr val="467886"/>
+      </a:hlink>
+      <a:folHlink>
+        <a:srgbClr val="96607D"/>
+      </a:folHlink>
+    </a:clrScheme>
+    <a:fontScheme name="Office">
+      <a:majorFont>
+        <a:latin typeface="Aptos Display" panose="02110004020202020204"/>
+        <a:ea typeface=""/>
+        <a:cs typeface=""/>
+        <a:font script="Jpan" typeface="游ゴシック Light"/>
+        <a:font script="Hang" typeface="맑은 고딕"/>
+        <a:font script="Hans" typeface="等线 Light"/>
+        <a:font script="Hant" typeface="新細明體"/>
+        <a:font script="Arab" typeface="Times New Roman"/>
+        <a:font script="Hebr" typeface="Times New Roman"/>
+        <a:font script="Thai" typeface="Angsana New"/>
+        <a:font script="Ethi" typeface="Nyala"/>
+        <a:font script="Beng" typeface="Vrinda"/>
+        <a:font script="Gujr" typeface="Shruti"/>
+        <a:font script="Khmr" typeface="MoolBoran"/>
+        <a:font script="Knda" typeface="Tunga"/>
+        <a:font script="Guru" typeface="Raavi"/>
+        <a:font script="Cans" typeface="Euphemia"/>
+        <a:font script="Cher" typeface="Plantagenet Cherokee"/>
+        <a:font script="Yiii" typeface="Microsoft Yi Baiti"/>
+        <a:font script="Tibt" typeface="Microsoft Himalaya"/>
+        <a:font script="Thaa" typeface="MV Boli"/>
+        <a:font script="Deva" typeface="Mangal"/>
+        <a:font script="Telu" typeface="Gautami"/>
+        <a:font script="Taml" typeface="Latha"/>
+        <a:font script="Syrc" typeface="Estrangelo Edessa"/>
+        <a:font script="Orya" typeface="Kalinga"/>
+        <a:font script="Mlym" typeface="Kartika"/>
+        <a:font script="Laoo" typeface="DokChampa"/>
+        <a:font script="Sinh" typeface="Iskoola Pota"/>
+        <a:font script="Mong" typeface="Mongolian Baiti"/>
+        <a:font script="Viet" typeface="Times New Roman"/>
+        <a:font script="Uigh" typeface="Microsoft Uighur"/>
+        <a:font script="Geor" typeface="Sylfaen"/>
+        <a:font script="Armn" typeface="Arial"/>
+        <a:font script="Bugi" typeface="Leelawadee UI"/>
+        <a:font script="Bopo" typeface="Microsoft JhengHei"/>
+        <a:font script="Java" typeface="Javanese Text"/>
+        <a:font script="Lisu" typeface="Segoe UI"/>
+        <a:font script="Mymr" typeface="Myanmar Text"/>
+        <a:font script="Nkoo" typeface="Ebrima"/>
+        <a:font script="Olck" typeface="Nirmala UI"/>
+        <a:font script="Osma" typeface="Ebrima"/>
+        <a:font script="Phag" typeface="Phagspa"/>
+        <a:font script="Syrn" typeface="Estrangelo Edessa"/>
+        <a:font script="Syrj" typeface="Estrangelo Edessa"/>
+        <a:font script="Syre" typeface="Estrangelo Edessa"/>
+        <a:font script="Sora" typeface="Nirmala UI"/>
+        <a:font script="Tale" typeface="Microsoft Tai Le"/>
+        <a:font script="Talu" typeface="Microsoft New Tai Lue"/>
+        <a:font script="Tfng" typeface="Ebrima"/>
+      </a:majorFont>
+      <a:minorFont>
+        <a:latin typeface="Aptos" panose="02110004020202020204"/>
+        <a:ea typeface=""/>
+        <a:cs typeface=""/>
+        <a:font script="Jpan" typeface="游ゴシック"/>
+        <a:font script="Hang" typeface="맑은 고딕"/>
+        <a:font script="Hans" typeface="等线"/>
+        <a:font script="Hant" typeface="新細明體"/>
+        <a:font script="Arab" typeface="Arial"/>
+        <a:font script="Hebr" typeface="Arial"/>
+        <a:font script="Thai" typeface="Cordia New"/>
+        <a:font script="Ethi" typeface="Nyala"/>
+        <a:font script="Beng" typeface="Vrinda"/>
+        <a:font script="Gujr" typeface="Shruti"/>
+        <a:font script="Khmr" typeface="DaunPenh"/>
+        <a:font script="Knda" typeface="Tunga"/>
+        <a:font script="Guru" typeface="Raavi"/>
+        <a:font script="Cans" typeface="Euphemia"/>
+        <a:font script="Cher" typeface="Plantagenet Cherokee"/>
+        <a:font script="Yiii" typeface="Microsoft Yi Baiti"/>
+        <a:font script="Tibt" typeface="Microsoft Himalaya"/>
+        <a:font script="Thaa" typeface="MV Boli"/>
+        <a:font script="Deva" typeface="Mangal"/>
+        <a:font script="Telu" typeface="Gautami"/>
+        <a:font script="Taml" typeface="Latha"/>
+        <a:font script="Syrc" typeface="Estrangelo Edessa"/>
+        <a:font script="Orya" typeface="Kalinga"/>
+        <a:font script="Mlym" typeface="Kartika"/>
+        <a:font script="Laoo" typeface="DokChampa"/>
+        <a:font script="Sinh" typeface="Iskoola Pota"/>
+        <a:font script="Mong" typeface="Mongolian Baiti"/>
+        <a:font script="Viet" typeface="Arial"/>
+        <a:font script="Uigh" typeface="Microsoft Uighur"/>
+        <a:font script="Geor" typeface="Sylfaen"/>
+        <a:font script="Armn" typeface="Arial"/>
+        <a:font script="Bugi" typeface="Leelawadee UI"/>
+        <a:font script="Bopo" typeface="Microsoft JhengHei"/>
+        <a:font script="Java" typeface="Javanese Text"/>
+        <a:font script="Lisu" typeface="Segoe UI"/>
+        <a:font script="Mymr" typeface="Myanmar Text"/>
+        <a:font script="Nkoo" typeface="Ebrima"/>
+        <a:font script="Olck" typeface="Nirmala UI"/>
+        <a:font script="Osma" typeface="Ebrima"/>
+        <a:font script="Phag" typeface="Phagspa"/>
+        <a:font script="Syrn" typeface="Estrangelo Edessa"/>
+        <a:font script="Syrj" typeface="Estrangelo Edessa"/>
+        <a:font script="Syre" typeface="Estrangelo Edessa"/>
+        <a:font script="Sora" typeface="Nirmala UI"/>
+        <a:font script="Tale" typeface="Microsoft Tai Le"/>
+        <a:font script="Talu" typeface="Microsoft New Tai Lue"/>
+        <a:font script="Tfng" typeface="Ebrima"/>
+      </a:minorFont>
+    </a:fontScheme>
+    <a:fmtScheme name="Office">
+      <a:fillStyleLst>
+        <a:solidFill>
+          <a:schemeClr val="phClr"/>
+        </a:solidFill>
+        <a:gradFill rotWithShape="1">
+          <a:gsLst>
+            <a:gs pos="0">
+              <a:schemeClr val="phClr">
+                <a:lumMod val="110000"/>
+                <a:satMod val="105000"/>
+                <a:tint val="67000"/>
+              </a:schemeClr>
+            </a:gs>
+            <a:gs pos="50000">
+              <a:schemeClr val="phClr">
+                <a:lumMod val="105000"/>
+                <a:satMod val="103000"/>
+                <a:tint val="73000"/>
+              </a:schemeClr>
+            </a:gs>
+            <a:gs pos="100000">
+              <a:schemeClr val="phClr">
+                <a:lumMod val="105000"/>
+                <a:satMod val="109000"/>
+                <a:tint val="81000"/>
+              </a:schemeClr>
+            </a:gs>
+          </a:gsLst>
+          <a:lin ang="5400000" scaled="0"/>
+        </a:gradFill>
+        <a:gradFill rotWithShape="1">
+          <a:gsLst>
+            <a:gs pos="0">
+              <a:schemeClr val="phClr">
+                <a:satMod val="103000"/>
+                <a:lumMod val="102000"/>
+                <a:tint val="94000"/>
+              </a:schemeClr>
+            </a:gs>
+            <a:gs pos="50000">
+              <a:schemeClr val="phClr">
+                <a:satMod val="110000"/>
+                <a:lumMod val="100000"/>
+                <a:shade val="100000"/>
+              </a:schemeClr>
+            </a:gs>
+            <a:gs pos="100000">
+              <a:schemeClr val="phClr">
+                <a:lumMod val="99000"/>
+                <a:satMod val="120000"/>
+                <a:shade val="78000"/>
+              </a:schemeClr>
+            </a:gs>
+          </a:gsLst>
+          <a:lin ang="5400000" scaled="0"/>
+        </a:gradFill>
+      </a:fillStyleLst>
+      <a:lnStyleLst>
+        <a:ln w="12700" cap="flat" cmpd="sng" algn="ctr">
+          <a:solidFill>
+            <a:schemeClr val="phClr"/>
+          </a:solidFill>
+          <a:prstDash val="solid"/>
+          <a:miter lim="800000"/>
+        </a:ln>
+        <a:ln w="19050" cap="flat" cmpd="sng" algn="ctr">
+          <a:solidFill>
+            <a:schemeClr val="phClr"/>
+          </a:solidFill>
+          <a:prstDash val="solid"/>
+          <a:miter lim="800000"/>
+        </a:ln>
+        <a:ln w="25400" cap="flat" cmpd="sng" algn="ctr">
+          <a:solidFill>
+            <a:schemeClr val="phClr"/>
+          </a:solidFill>
+          <a:prstDash val="solid"/>
+          <a:miter lim="800000"/>
+        </a:ln>
+      </a:lnStyleLst>
+      <a:effectStyleLst>
+        <a:effectStyle>
+          <a:effectLst/>
+        </a:effectStyle>
+        <a:effectStyle>
+          <a:effectLst/>
+        </a:effectStyle>
+        <a:effectStyle>
+          <a:effectLst>
+            <a:outerShdw blurRad="57150" dist="19050" dir="5400000" algn="ctr" rotWithShape="0">
+              <a:srgbClr val="000000">
+                <a:alpha val="63000"/>
+              </a:srgbClr>
+            </a:outerShdw>
+          </a:effectLst>
+        </a:effectStyle>
+      </a:effectStyleLst>
+      <a:bgFillStyleLst>
+        <a:solidFill>
+          <a:schemeClr val="phClr"/>
+        </a:solidFill>
+        <a:solidFill>
+          <a:schemeClr val="phClr">
+            <a:tint val="95000"/>
+            <a:satMod val="170000"/>
+          </a:schemeClr>
+        </a:solidFill>
+        <a:gradFill rotWithShape="1">
+          <a:gsLst>
+            <a:gs pos="0">
+              <a:schemeClr val="phClr">
+                <a:tint val="93000"/>
+                <a:satMod val="150000"/>
+                <a:shade val="98000"/>
+                <a:lumMod val="102000"/>
+              </a:schemeClr>
+            </a:gs>
+            <a:gs pos="50000">
+              <a:schemeClr val="phClr">
+                <a:tint val="98000"/>
+                <a:satMod val="130000"/>
+                <a:shade val="90000"/>
+                <a:lumMod val="103000"/>
+              </a:schemeClr>
+            </a:gs>
+            <a:gs pos="100000">
+              <a:schemeClr val="phClr">
+                <a:shade val="63000"/>
+                <a:satMod val="120000"/>
+              </a:schemeClr>
+            </a:gs>
+          </a:gsLst>
+          <a:lin ang="5400000" scaled="0"/>
+        </a:gradFill>
+      </a:bgFillStyleLst>
+    </a:fmtScheme>
+  </a:themeElements>
+  <a:objectDefaults>
+    <a:lnDef>
+      <a:spPr/>
+      <a:bodyPr/>
+      <a:lstStyle/>
+      <a:style>
+        <a:lnRef idx="2">
+          <a:schemeClr val="accent1"/>
+        </a:lnRef>
+        <a:fillRef idx="0">
+          <a:schemeClr val="accent1"/>
+        </a:fillRef>
+        <a:effectRef idx="1">
+          <a:schemeClr val="accent1"/>
+        </a:effectRef>
+        <a:fontRef idx="minor">
+          <a:schemeClr val="tx1"/>
+        </a:fontRef>
+      </a:style>
+    </a:lnDef>
+  </a:objectDefaults>
+  <a:extraClrSchemeLst/>
+  <a:extLst>
+    <a:ext uri="{05A4C25C-085E-4340-85A3-A5531E510DB2}">
+      <thm15:themeFamily xmlns:thm15="http://schemas.microsoft.com/office/thememl/2012/main" name="Office Theme" id="{2E142A2C-CD16-42D6-873A-C26D2A0506FA}" vid="{1BDDFF52-6CD6-40A5-AB3C-68EB2F1E4D0A}"/>
+    </a:ext>
+  </a:extLst>
+</a:theme>
 </file>